--- a/Software/Ball Stick Model/Ball_and_Stick_Diagram.pptx
+++ b/Software/Ball Stick Model/Ball_and_Stick_Diagram.pptx
@@ -6,6 +6,7 @@
   </p:sldMasterIdLst>
   <p:sldIdLst>
     <p:sldId id="256" r:id="rId2"/>
+    <p:sldId id="257" r:id="rId3"/>
   </p:sldIdLst>
   <p:sldSz cx="18288000" cy="18288000"/>
   <p:notesSz cx="6858000" cy="9144000"/>
@@ -110,6 +111,7 @@
         <p14:section name="Untitled Section" id="{E41E56DA-E16D-4E20-91B7-FC4E3D20EC07}">
           <p14:sldIdLst>
             <p14:sldId id="256"/>
+            <p14:sldId id="257"/>
           </p14:sldIdLst>
         </p14:section>
       </p14:sectionLst>
@@ -260,7 +262,7 @@
           <a:p>
             <a:fld id="{63482D1D-FC44-41DB-BF30-117B3BFBC943}" type="datetimeFigureOut">
               <a:rPr lang="en-US" smtClean="0"/>
-              <a:t>10/27/2025</a:t>
+              <a:t>1/15/2026</a:t>
             </a:fld>
             <a:endParaRPr lang="en-US"/>
           </a:p>
@@ -430,7 +432,7 @@
           <a:p>
             <a:fld id="{63482D1D-FC44-41DB-BF30-117B3BFBC943}" type="datetimeFigureOut">
               <a:rPr lang="en-US" smtClean="0"/>
-              <a:t>10/27/2025</a:t>
+              <a:t>1/15/2026</a:t>
             </a:fld>
             <a:endParaRPr lang="en-US"/>
           </a:p>
@@ -610,7 +612,7 @@
           <a:p>
             <a:fld id="{63482D1D-FC44-41DB-BF30-117B3BFBC943}" type="datetimeFigureOut">
               <a:rPr lang="en-US" smtClean="0"/>
-              <a:t>10/27/2025</a:t>
+              <a:t>1/15/2026</a:t>
             </a:fld>
             <a:endParaRPr lang="en-US"/>
           </a:p>
@@ -780,7 +782,7 @@
           <a:p>
             <a:fld id="{63482D1D-FC44-41DB-BF30-117B3BFBC943}" type="datetimeFigureOut">
               <a:rPr lang="en-US" smtClean="0"/>
-              <a:t>10/27/2025</a:t>
+              <a:t>1/15/2026</a:t>
             </a:fld>
             <a:endParaRPr lang="en-US"/>
           </a:p>
@@ -1026,7 +1028,7 @@
           <a:p>
             <a:fld id="{63482D1D-FC44-41DB-BF30-117B3BFBC943}" type="datetimeFigureOut">
               <a:rPr lang="en-US" smtClean="0"/>
-              <a:t>10/27/2025</a:t>
+              <a:t>1/15/2026</a:t>
             </a:fld>
             <a:endParaRPr lang="en-US"/>
           </a:p>
@@ -1258,7 +1260,7 @@
           <a:p>
             <a:fld id="{63482D1D-FC44-41DB-BF30-117B3BFBC943}" type="datetimeFigureOut">
               <a:rPr lang="en-US" smtClean="0"/>
-              <a:t>10/27/2025</a:t>
+              <a:t>1/15/2026</a:t>
             </a:fld>
             <a:endParaRPr lang="en-US"/>
           </a:p>
@@ -1625,7 +1627,7 @@
           <a:p>
             <a:fld id="{63482D1D-FC44-41DB-BF30-117B3BFBC943}" type="datetimeFigureOut">
               <a:rPr lang="en-US" smtClean="0"/>
-              <a:t>10/27/2025</a:t>
+              <a:t>1/15/2026</a:t>
             </a:fld>
             <a:endParaRPr lang="en-US"/>
           </a:p>
@@ -1743,7 +1745,7 @@
           <a:p>
             <a:fld id="{63482D1D-FC44-41DB-BF30-117B3BFBC943}" type="datetimeFigureOut">
               <a:rPr lang="en-US" smtClean="0"/>
-              <a:t>10/27/2025</a:t>
+              <a:t>1/15/2026</a:t>
             </a:fld>
             <a:endParaRPr lang="en-US"/>
           </a:p>
@@ -1838,7 +1840,7 @@
           <a:p>
             <a:fld id="{63482D1D-FC44-41DB-BF30-117B3BFBC943}" type="datetimeFigureOut">
               <a:rPr lang="en-US" smtClean="0"/>
-              <a:t>10/27/2025</a:t>
+              <a:t>1/15/2026</a:t>
             </a:fld>
             <a:endParaRPr lang="en-US"/>
           </a:p>
@@ -2115,7 +2117,7 @@
           <a:p>
             <a:fld id="{63482D1D-FC44-41DB-BF30-117B3BFBC943}" type="datetimeFigureOut">
               <a:rPr lang="en-US" smtClean="0"/>
-              <a:t>10/27/2025</a:t>
+              <a:t>1/15/2026</a:t>
             </a:fld>
             <a:endParaRPr lang="en-US"/>
           </a:p>
@@ -2372,7 +2374,7 @@
           <a:p>
             <a:fld id="{63482D1D-FC44-41DB-BF30-117B3BFBC943}" type="datetimeFigureOut">
               <a:rPr lang="en-US" smtClean="0"/>
-              <a:t>10/27/2025</a:t>
+              <a:t>1/15/2026</a:t>
             </a:fld>
             <a:endParaRPr lang="en-US"/>
           </a:p>
@@ -2585,7 +2587,7 @@
           <a:p>
             <a:fld id="{63482D1D-FC44-41DB-BF30-117B3BFBC943}" type="datetimeFigureOut">
               <a:rPr lang="en-US" smtClean="0"/>
-              <a:t>10/27/2025</a:t>
+              <a:t>1/15/2026</a:t>
             </a:fld>
             <a:endParaRPr lang="en-US"/>
           </a:p>
@@ -6129,7 +6131,7 @@
         </p:nvSpPr>
         <p:spPr>
           <a:xfrm>
-            <a:off x="13820671" y="12449446"/>
+            <a:off x="15300661" y="13223812"/>
             <a:ext cx="342900" cy="342900"/>
           </a:xfrm>
           <a:prstGeom prst="ellipse">
@@ -6186,7 +6188,7 @@
         </p:nvCxnSpPr>
         <p:spPr>
           <a:xfrm>
-            <a:off x="14006407" y="12607829"/>
+            <a:off x="15486397" y="13382195"/>
             <a:ext cx="3604806" cy="355967"/>
           </a:xfrm>
           <a:prstGeom prst="line">
@@ -6229,7 +6231,7 @@
         </p:nvSpPr>
         <p:spPr>
           <a:xfrm>
-            <a:off x="17403479" y="12850304"/>
+            <a:off x="18883469" y="13624670"/>
             <a:ext cx="342900" cy="342900"/>
           </a:xfrm>
           <a:prstGeom prst="ellipse">
@@ -6336,7 +6338,7 @@
         </p:nvCxnSpPr>
         <p:spPr>
           <a:xfrm>
-            <a:off x="15834061" y="10361826"/>
+            <a:off x="17314051" y="11136192"/>
             <a:ext cx="1708153" cy="2561695"/>
           </a:xfrm>
           <a:prstGeom prst="line">
@@ -6379,7 +6381,7 @@
         </p:nvSpPr>
         <p:spPr>
           <a:xfrm>
-            <a:off x="15653055" y="10162734"/>
+            <a:off x="17133045" y="10937100"/>
             <a:ext cx="342900" cy="342900"/>
           </a:xfrm>
           <a:prstGeom prst="ellipse">
@@ -6911,7 +6913,7 @@
         </p:nvCxnSpPr>
         <p:spPr>
           <a:xfrm flipV="1">
-            <a:off x="12367209" y="12632441"/>
+            <a:off x="13847199" y="13406807"/>
             <a:ext cx="1676400" cy="1435100"/>
           </a:xfrm>
           <a:prstGeom prst="line">
@@ -7417,10 +7419,4570 @@
           </a:p>
         </p:txBody>
       </p:sp>
+      <p:cxnSp>
+        <p:nvCxnSpPr>
+          <p:cNvPr id="19" name="Straight Connector 18">
+            <a:extLst>
+              <a:ext uri="{FF2B5EF4-FFF2-40B4-BE49-F238E27FC236}">
+                <a16:creationId xmlns:a16="http://schemas.microsoft.com/office/drawing/2014/main" id="{AE834FF5-A5B5-9DF0-9B85-F08C60ED387D}"/>
+              </a:ext>
+            </a:extLst>
+          </p:cNvPr>
+          <p:cNvCxnSpPr>
+            <a:cxnSpLocks/>
+          </p:cNvCxnSpPr>
+          <p:nvPr/>
+        </p:nvCxnSpPr>
+        <p:spPr>
+          <a:xfrm flipH="1" flipV="1">
+            <a:off x="12487931" y="14053070"/>
+            <a:ext cx="1347461" cy="801143"/>
+          </a:xfrm>
+          <a:prstGeom prst="line">
+            <a:avLst/>
+          </a:prstGeom>
+          <a:ln w="76200">
+            <a:solidFill>
+              <a:schemeClr val="accent2">
+                <a:lumMod val="75000"/>
+              </a:schemeClr>
+            </a:solidFill>
+          </a:ln>
+        </p:spPr>
+        <p:style>
+          <a:lnRef idx="2">
+            <a:schemeClr val="accent1"/>
+          </a:lnRef>
+          <a:fillRef idx="0">
+            <a:schemeClr val="accent1"/>
+          </a:fillRef>
+          <a:effectRef idx="1">
+            <a:schemeClr val="accent1"/>
+          </a:effectRef>
+          <a:fontRef idx="minor">
+            <a:schemeClr val="tx1"/>
+          </a:fontRef>
+        </p:style>
+      </p:cxnSp>
+      <p:sp>
+        <p:nvSpPr>
+          <p:cNvPr id="25" name="Oval 24">
+            <a:extLst>
+              <a:ext uri="{FF2B5EF4-FFF2-40B4-BE49-F238E27FC236}">
+                <a16:creationId xmlns:a16="http://schemas.microsoft.com/office/drawing/2014/main" id="{9FE17AE2-70CF-63AE-5CF8-CA82F8597C1A}"/>
+              </a:ext>
+            </a:extLst>
+          </p:cNvPr>
+          <p:cNvSpPr/>
+          <p:nvPr/>
+        </p:nvSpPr>
+        <p:spPr>
+          <a:xfrm>
+            <a:off x="13675749" y="14730325"/>
+            <a:ext cx="342900" cy="342900"/>
+          </a:xfrm>
+          <a:prstGeom prst="ellipse">
+            <a:avLst/>
+          </a:prstGeom>
+          <a:solidFill>
+            <a:srgbClr val="7030A0"/>
+          </a:solidFill>
+          <a:ln>
+            <a:noFill/>
+          </a:ln>
+        </p:spPr>
+        <p:style>
+          <a:lnRef idx="2">
+            <a:schemeClr val="accent1">
+              <a:shade val="15000"/>
+            </a:schemeClr>
+          </a:lnRef>
+          <a:fillRef idx="1">
+            <a:schemeClr val="accent1"/>
+          </a:fillRef>
+          <a:effectRef idx="0">
+            <a:schemeClr val="accent1"/>
+          </a:effectRef>
+          <a:fontRef idx="minor">
+            <a:schemeClr val="lt1"/>
+          </a:fontRef>
+        </p:style>
+        <p:txBody>
+          <a:bodyPr rtlCol="0" anchor="ctr"/>
+          <a:lstStyle/>
+          <a:p>
+            <a:pPr algn="ctr"/>
+            <a:endParaRPr lang="en-US" sz="3000"/>
+          </a:p>
+        </p:txBody>
+      </p:sp>
     </p:spTree>
     <p:extLst>
       <p:ext uri="{BB962C8B-B14F-4D97-AF65-F5344CB8AC3E}">
         <p14:creationId xmlns:p14="http://schemas.microsoft.com/office/powerpoint/2010/main" val="1452994830"/>
+      </p:ext>
+    </p:extLst>
+  </p:cSld>
+  <p:clrMapOvr>
+    <a:masterClrMapping/>
+  </p:clrMapOvr>
+</p:sld>
+</file>
+
+<file path=ppt/slides/slide2.xml><?xml version="1.0" encoding="utf-8"?>
+<p:sld xmlns:a="http://schemas.openxmlformats.org/drawingml/2006/main" xmlns:r="http://schemas.openxmlformats.org/officeDocument/2006/relationships" xmlns:p="http://schemas.openxmlformats.org/presentationml/2006/main">
+  <p:cSld>
+    <p:spTree>
+      <p:nvGrpSpPr>
+        <p:cNvPr id="1" name="">
+          <a:extLst>
+            <a:ext uri="{FF2B5EF4-FFF2-40B4-BE49-F238E27FC236}">
+              <a16:creationId xmlns:a16="http://schemas.microsoft.com/office/drawing/2014/main" id="{EAD7C893-E9BF-7D1E-9DCF-3C25EB7B1659}"/>
+            </a:ext>
+          </a:extLst>
+        </p:cNvPr>
+        <p:cNvGrpSpPr/>
+        <p:nvPr/>
+      </p:nvGrpSpPr>
+      <p:grpSpPr>
+        <a:xfrm>
+          <a:off x="0" y="0"/>
+          <a:ext cx="0" cy="0"/>
+          <a:chOff x="0" y="0"/>
+          <a:chExt cx="0" cy="0"/>
+        </a:xfrm>
+      </p:grpSpPr>
+      <p:sp>
+        <p:nvSpPr>
+          <p:cNvPr id="99" name="TextBox 98">
+            <a:extLst>
+              <a:ext uri="{FF2B5EF4-FFF2-40B4-BE49-F238E27FC236}">
+                <a16:creationId xmlns:a16="http://schemas.microsoft.com/office/drawing/2014/main" id="{57C9F2BE-CABD-0C12-977D-0C46ED2ED08A}"/>
+              </a:ext>
+            </a:extLst>
+          </p:cNvPr>
+          <p:cNvSpPr txBox="1"/>
+          <p:nvPr/>
+        </p:nvSpPr>
+        <p:spPr>
+          <a:xfrm>
+            <a:off x="9711193" y="9701122"/>
+            <a:ext cx="3702438" cy="779026"/>
+          </a:xfrm>
+          <a:prstGeom prst="roundRect">
+            <a:avLst>
+              <a:gd name="adj" fmla="val 50000"/>
+            </a:avLst>
+          </a:prstGeom>
+          <a:solidFill>
+            <a:schemeClr val="tx1">
+              <a:alpha val="10000"/>
+            </a:schemeClr>
+          </a:solidFill>
+        </p:spPr>
+        <p:txBody>
+          <a:bodyPr wrap="square" lIns="0" tIns="0" rIns="0" bIns="0" rtlCol="0">
+            <a:spAutoFit/>
+          </a:bodyPr>
+          <a:lstStyle/>
+          <a:p>
+            <a:pPr algn="ctr"/>
+            <a:r>
+              <a:rPr lang="en-US" sz="3600" b="1" dirty="0"/>
+              <a:t>Trimetric View</a:t>
+            </a:r>
+          </a:p>
+        </p:txBody>
+      </p:sp>
+      <p:sp>
+        <p:nvSpPr>
+          <p:cNvPr id="53" name="TextBox 52">
+            <a:extLst>
+              <a:ext uri="{FF2B5EF4-FFF2-40B4-BE49-F238E27FC236}">
+                <a16:creationId xmlns:a16="http://schemas.microsoft.com/office/drawing/2014/main" id="{38F170A8-1A78-F786-2782-561C9C002F9D}"/>
+              </a:ext>
+            </a:extLst>
+          </p:cNvPr>
+          <p:cNvSpPr txBox="1"/>
+          <p:nvPr/>
+        </p:nvSpPr>
+        <p:spPr>
+          <a:xfrm>
+            <a:off x="276680" y="210721"/>
+            <a:ext cx="3702438" cy="779026"/>
+          </a:xfrm>
+          <a:prstGeom prst="roundRect">
+            <a:avLst>
+              <a:gd name="adj" fmla="val 50000"/>
+            </a:avLst>
+          </a:prstGeom>
+          <a:solidFill>
+            <a:schemeClr val="tx1">
+              <a:alpha val="10000"/>
+            </a:schemeClr>
+          </a:solidFill>
+        </p:spPr>
+        <p:txBody>
+          <a:bodyPr wrap="square" lIns="0" tIns="0" rIns="0" bIns="0" rtlCol="0">
+            <a:spAutoFit/>
+          </a:bodyPr>
+          <a:lstStyle/>
+          <a:p>
+            <a:pPr algn="ctr"/>
+            <a:r>
+              <a:rPr lang="en-US" sz="3600" b="1" dirty="0"/>
+              <a:t>Y – Z Plane</a:t>
+            </a:r>
+          </a:p>
+        </p:txBody>
+      </p:sp>
+      <p:cxnSp>
+        <p:nvCxnSpPr>
+          <p:cNvPr id="5" name="Straight Connector 4">
+            <a:extLst>
+              <a:ext uri="{FF2B5EF4-FFF2-40B4-BE49-F238E27FC236}">
+                <a16:creationId xmlns:a16="http://schemas.microsoft.com/office/drawing/2014/main" id="{9DE22FF9-0C82-C614-A531-545785BCF782}"/>
+              </a:ext>
+            </a:extLst>
+          </p:cNvPr>
+          <p:cNvCxnSpPr/>
+          <p:nvPr/>
+        </p:nvCxnSpPr>
+        <p:spPr>
+          <a:xfrm flipV="1">
+            <a:off x="2057400" y="4851400"/>
+            <a:ext cx="0" cy="2387600"/>
+          </a:xfrm>
+          <a:prstGeom prst="line">
+            <a:avLst/>
+          </a:prstGeom>
+          <a:ln w="76200">
+            <a:solidFill>
+              <a:schemeClr val="accent2">
+                <a:lumMod val="75000"/>
+              </a:schemeClr>
+            </a:solidFill>
+          </a:ln>
+        </p:spPr>
+        <p:style>
+          <a:lnRef idx="2">
+            <a:schemeClr val="accent1"/>
+          </a:lnRef>
+          <a:fillRef idx="0">
+            <a:schemeClr val="accent1"/>
+          </a:fillRef>
+          <a:effectRef idx="1">
+            <a:schemeClr val="accent1"/>
+          </a:effectRef>
+          <a:fontRef idx="minor">
+            <a:schemeClr val="tx1"/>
+          </a:fontRef>
+        </p:style>
+      </p:cxnSp>
+      <p:cxnSp>
+        <p:nvCxnSpPr>
+          <p:cNvPr id="6" name="Straight Connector 5">
+            <a:extLst>
+              <a:ext uri="{FF2B5EF4-FFF2-40B4-BE49-F238E27FC236}">
+                <a16:creationId xmlns:a16="http://schemas.microsoft.com/office/drawing/2014/main" id="{84CAB50C-9D61-7B1C-28E1-9B4EC5499932}"/>
+              </a:ext>
+            </a:extLst>
+          </p:cNvPr>
+          <p:cNvCxnSpPr>
+            <a:cxnSpLocks/>
+          </p:cNvCxnSpPr>
+          <p:nvPr/>
+        </p:nvCxnSpPr>
+        <p:spPr>
+          <a:xfrm flipV="1">
+            <a:off x="2057400" y="3416300"/>
+            <a:ext cx="1676400" cy="1435100"/>
+          </a:xfrm>
+          <a:prstGeom prst="line">
+            <a:avLst/>
+          </a:prstGeom>
+          <a:ln w="76200">
+            <a:solidFill>
+              <a:schemeClr val="accent2">
+                <a:lumMod val="75000"/>
+              </a:schemeClr>
+            </a:solidFill>
+          </a:ln>
+        </p:spPr>
+        <p:style>
+          <a:lnRef idx="2">
+            <a:schemeClr val="accent1"/>
+          </a:lnRef>
+          <a:fillRef idx="0">
+            <a:schemeClr val="accent1"/>
+          </a:fillRef>
+          <a:effectRef idx="1">
+            <a:schemeClr val="accent1"/>
+          </a:effectRef>
+          <a:fontRef idx="minor">
+            <a:schemeClr val="tx1"/>
+          </a:fontRef>
+        </p:style>
+      </p:cxnSp>
+      <p:cxnSp>
+        <p:nvCxnSpPr>
+          <p:cNvPr id="8" name="Straight Connector 7">
+            <a:extLst>
+              <a:ext uri="{FF2B5EF4-FFF2-40B4-BE49-F238E27FC236}">
+                <a16:creationId xmlns:a16="http://schemas.microsoft.com/office/drawing/2014/main" id="{091987AD-9673-34C0-7B10-ED7FCBFF13BD}"/>
+              </a:ext>
+            </a:extLst>
+          </p:cNvPr>
+          <p:cNvCxnSpPr>
+            <a:cxnSpLocks/>
+          </p:cNvCxnSpPr>
+          <p:nvPr/>
+        </p:nvCxnSpPr>
+        <p:spPr>
+          <a:xfrm flipV="1">
+            <a:off x="3733800" y="1981200"/>
+            <a:ext cx="1676400" cy="1435100"/>
+          </a:xfrm>
+          <a:prstGeom prst="line">
+            <a:avLst/>
+          </a:prstGeom>
+          <a:ln w="76200">
+            <a:solidFill>
+              <a:schemeClr val="accent2">
+                <a:lumMod val="75000"/>
+              </a:schemeClr>
+            </a:solidFill>
+          </a:ln>
+        </p:spPr>
+        <p:style>
+          <a:lnRef idx="2">
+            <a:schemeClr val="accent1"/>
+          </a:lnRef>
+          <a:fillRef idx="0">
+            <a:schemeClr val="accent1"/>
+          </a:fillRef>
+          <a:effectRef idx="1">
+            <a:schemeClr val="accent1"/>
+          </a:effectRef>
+          <a:fontRef idx="minor">
+            <a:schemeClr val="tx1"/>
+          </a:fontRef>
+        </p:style>
+      </p:cxnSp>
+      <p:cxnSp>
+        <p:nvCxnSpPr>
+          <p:cNvPr id="9" name="Straight Connector 8">
+            <a:extLst>
+              <a:ext uri="{FF2B5EF4-FFF2-40B4-BE49-F238E27FC236}">
+                <a16:creationId xmlns:a16="http://schemas.microsoft.com/office/drawing/2014/main" id="{54B164AF-21ED-33BE-0823-5AD9C6371DE0}"/>
+              </a:ext>
+            </a:extLst>
+          </p:cNvPr>
+          <p:cNvCxnSpPr>
+            <a:cxnSpLocks/>
+          </p:cNvCxnSpPr>
+          <p:nvPr/>
+        </p:nvCxnSpPr>
+        <p:spPr>
+          <a:xfrm flipV="1">
+            <a:off x="5410200" y="546100"/>
+            <a:ext cx="1676400" cy="1435100"/>
+          </a:xfrm>
+          <a:prstGeom prst="line">
+            <a:avLst/>
+          </a:prstGeom>
+          <a:ln w="76200">
+            <a:solidFill>
+              <a:schemeClr val="accent2">
+                <a:lumMod val="75000"/>
+              </a:schemeClr>
+            </a:solidFill>
+          </a:ln>
+        </p:spPr>
+        <p:style>
+          <a:lnRef idx="2">
+            <a:schemeClr val="accent1"/>
+          </a:lnRef>
+          <a:fillRef idx="0">
+            <a:schemeClr val="accent1"/>
+          </a:fillRef>
+          <a:effectRef idx="1">
+            <a:schemeClr val="accent1"/>
+          </a:effectRef>
+          <a:fontRef idx="minor">
+            <a:schemeClr val="tx1"/>
+          </a:fontRef>
+        </p:style>
+      </p:cxnSp>
+      <p:sp>
+        <p:nvSpPr>
+          <p:cNvPr id="10" name="Oval 9">
+            <a:extLst>
+              <a:ext uri="{FF2B5EF4-FFF2-40B4-BE49-F238E27FC236}">
+                <a16:creationId xmlns:a16="http://schemas.microsoft.com/office/drawing/2014/main" id="{D089E19B-2114-BB2E-A09C-C25EABA4FE07}"/>
+              </a:ext>
+            </a:extLst>
+          </p:cNvPr>
+          <p:cNvSpPr/>
+          <p:nvPr/>
+        </p:nvSpPr>
+        <p:spPr>
+          <a:xfrm>
+            <a:off x="1885949" y="4679950"/>
+            <a:ext cx="342900" cy="342900"/>
+          </a:xfrm>
+          <a:prstGeom prst="ellipse">
+            <a:avLst/>
+          </a:prstGeom>
+          <a:solidFill>
+            <a:schemeClr val="tx1"/>
+          </a:solidFill>
+          <a:ln>
+            <a:noFill/>
+          </a:ln>
+        </p:spPr>
+        <p:style>
+          <a:lnRef idx="2">
+            <a:schemeClr val="accent1">
+              <a:shade val="15000"/>
+            </a:schemeClr>
+          </a:lnRef>
+          <a:fillRef idx="1">
+            <a:schemeClr val="accent1"/>
+          </a:fillRef>
+          <a:effectRef idx="0">
+            <a:schemeClr val="accent1"/>
+          </a:effectRef>
+          <a:fontRef idx="minor">
+            <a:schemeClr val="lt1"/>
+          </a:fontRef>
+        </p:style>
+        <p:txBody>
+          <a:bodyPr rtlCol="0" anchor="ctr"/>
+          <a:lstStyle/>
+          <a:p>
+            <a:pPr algn="ctr"/>
+            <a:endParaRPr lang="en-US" sz="3000"/>
+          </a:p>
+        </p:txBody>
+      </p:sp>
+      <p:sp>
+        <p:nvSpPr>
+          <p:cNvPr id="11" name="Oval 10">
+            <a:extLst>
+              <a:ext uri="{FF2B5EF4-FFF2-40B4-BE49-F238E27FC236}">
+                <a16:creationId xmlns:a16="http://schemas.microsoft.com/office/drawing/2014/main" id="{D9EAF8D8-CDFE-C04F-8EBA-2DC7C61A8A29}"/>
+              </a:ext>
+            </a:extLst>
+          </p:cNvPr>
+          <p:cNvSpPr/>
+          <p:nvPr/>
+        </p:nvSpPr>
+        <p:spPr>
+          <a:xfrm>
+            <a:off x="3562351" y="3244850"/>
+            <a:ext cx="342900" cy="342900"/>
+          </a:xfrm>
+          <a:prstGeom prst="ellipse">
+            <a:avLst/>
+          </a:prstGeom>
+          <a:solidFill>
+            <a:schemeClr val="accent5">
+              <a:lumMod val="40000"/>
+              <a:lumOff val="60000"/>
+            </a:schemeClr>
+          </a:solidFill>
+          <a:ln>
+            <a:noFill/>
+          </a:ln>
+        </p:spPr>
+        <p:style>
+          <a:lnRef idx="2">
+            <a:schemeClr val="accent1">
+              <a:shade val="15000"/>
+            </a:schemeClr>
+          </a:lnRef>
+          <a:fillRef idx="1">
+            <a:schemeClr val="accent1"/>
+          </a:fillRef>
+          <a:effectRef idx="0">
+            <a:schemeClr val="accent1"/>
+          </a:effectRef>
+          <a:fontRef idx="minor">
+            <a:schemeClr val="lt1"/>
+          </a:fontRef>
+        </p:style>
+        <p:txBody>
+          <a:bodyPr rtlCol="0" anchor="ctr"/>
+          <a:lstStyle/>
+          <a:p>
+            <a:pPr algn="ctr"/>
+            <a:endParaRPr lang="en-US" sz="3000"/>
+          </a:p>
+        </p:txBody>
+      </p:sp>
+      <p:sp>
+        <p:nvSpPr>
+          <p:cNvPr id="12" name="Oval 11">
+            <a:extLst>
+              <a:ext uri="{FF2B5EF4-FFF2-40B4-BE49-F238E27FC236}">
+                <a16:creationId xmlns:a16="http://schemas.microsoft.com/office/drawing/2014/main" id="{3D33F7A5-DE4E-BFB9-7542-F8C0C459F39C}"/>
+              </a:ext>
+            </a:extLst>
+          </p:cNvPr>
+          <p:cNvSpPr/>
+          <p:nvPr/>
+        </p:nvSpPr>
+        <p:spPr>
+          <a:xfrm>
+            <a:off x="5238750" y="1809750"/>
+            <a:ext cx="342900" cy="342900"/>
+          </a:xfrm>
+          <a:prstGeom prst="ellipse">
+            <a:avLst/>
+          </a:prstGeom>
+          <a:solidFill>
+            <a:schemeClr val="accent6">
+              <a:lumMod val="60000"/>
+              <a:lumOff val="40000"/>
+            </a:schemeClr>
+          </a:solidFill>
+          <a:ln>
+            <a:noFill/>
+          </a:ln>
+        </p:spPr>
+        <p:style>
+          <a:lnRef idx="2">
+            <a:schemeClr val="accent1">
+              <a:shade val="15000"/>
+            </a:schemeClr>
+          </a:lnRef>
+          <a:fillRef idx="1">
+            <a:schemeClr val="accent1"/>
+          </a:fillRef>
+          <a:effectRef idx="0">
+            <a:schemeClr val="accent1"/>
+          </a:effectRef>
+          <a:fontRef idx="minor">
+            <a:schemeClr val="lt1"/>
+          </a:fontRef>
+        </p:style>
+        <p:txBody>
+          <a:bodyPr rtlCol="0" anchor="ctr"/>
+          <a:lstStyle/>
+          <a:p>
+            <a:pPr algn="ctr"/>
+            <a:endParaRPr lang="en-US" sz="3000"/>
+          </a:p>
+        </p:txBody>
+      </p:sp>
+      <p:sp>
+        <p:nvSpPr>
+          <p:cNvPr id="13" name="Oval 12">
+            <a:extLst>
+              <a:ext uri="{FF2B5EF4-FFF2-40B4-BE49-F238E27FC236}">
+                <a16:creationId xmlns:a16="http://schemas.microsoft.com/office/drawing/2014/main" id="{8C99F672-45E6-A678-317C-2744BF8AA0BE}"/>
+              </a:ext>
+            </a:extLst>
+          </p:cNvPr>
+          <p:cNvSpPr/>
+          <p:nvPr/>
+        </p:nvSpPr>
+        <p:spPr>
+          <a:xfrm>
+            <a:off x="6915150" y="374650"/>
+            <a:ext cx="342900" cy="342900"/>
+          </a:xfrm>
+          <a:prstGeom prst="ellipse">
+            <a:avLst/>
+          </a:prstGeom>
+          <a:solidFill>
+            <a:srgbClr val="FF0000"/>
+          </a:solidFill>
+          <a:ln>
+            <a:noFill/>
+          </a:ln>
+        </p:spPr>
+        <p:style>
+          <a:lnRef idx="2">
+            <a:schemeClr val="accent1">
+              <a:shade val="15000"/>
+            </a:schemeClr>
+          </a:lnRef>
+          <a:fillRef idx="1">
+            <a:schemeClr val="accent1"/>
+          </a:fillRef>
+          <a:effectRef idx="0">
+            <a:schemeClr val="accent1"/>
+          </a:effectRef>
+          <a:fontRef idx="minor">
+            <a:schemeClr val="lt1"/>
+          </a:fontRef>
+        </p:style>
+        <p:txBody>
+          <a:bodyPr rtlCol="0" anchor="ctr"/>
+          <a:lstStyle/>
+          <a:p>
+            <a:pPr algn="ctr"/>
+            <a:endParaRPr lang="en-US" sz="3000"/>
+          </a:p>
+        </p:txBody>
+      </p:sp>
+      <p:sp>
+        <p:nvSpPr>
+          <p:cNvPr id="14" name="TextBox 13">
+            <a:extLst>
+              <a:ext uri="{FF2B5EF4-FFF2-40B4-BE49-F238E27FC236}">
+                <a16:creationId xmlns:a16="http://schemas.microsoft.com/office/drawing/2014/main" id="{20793E9E-4343-F79B-BFF0-F88471894CB3}"/>
+              </a:ext>
+            </a:extLst>
+          </p:cNvPr>
+          <p:cNvSpPr txBox="1"/>
+          <p:nvPr/>
+        </p:nvSpPr>
+        <p:spPr>
+          <a:xfrm>
+            <a:off x="1441450" y="6008300"/>
+            <a:ext cx="266699" cy="461665"/>
+          </a:xfrm>
+          <a:prstGeom prst="rect">
+            <a:avLst/>
+          </a:prstGeom>
+          <a:noFill/>
+        </p:spPr>
+        <p:txBody>
+          <a:bodyPr wrap="square" lIns="0" tIns="0" rIns="0" bIns="0" rtlCol="0">
+            <a:spAutoFit/>
+          </a:bodyPr>
+          <a:lstStyle/>
+          <a:p>
+            <a:pPr algn="ctr"/>
+            <a:r>
+              <a:rPr lang="en-US" sz="3000" dirty="0"/>
+              <a:t>A</a:t>
+            </a:r>
+          </a:p>
+        </p:txBody>
+      </p:sp>
+      <p:sp>
+        <p:nvSpPr>
+          <p:cNvPr id="15" name="TextBox 14">
+            <a:extLst>
+              <a:ext uri="{FF2B5EF4-FFF2-40B4-BE49-F238E27FC236}">
+                <a16:creationId xmlns:a16="http://schemas.microsoft.com/office/drawing/2014/main" id="{6D53584A-1D23-0683-C836-F83DFB20FA73}"/>
+              </a:ext>
+            </a:extLst>
+          </p:cNvPr>
+          <p:cNvSpPr txBox="1"/>
+          <p:nvPr/>
+        </p:nvSpPr>
+        <p:spPr>
+          <a:xfrm>
+            <a:off x="2540861" y="3641772"/>
+            <a:ext cx="266699" cy="461665"/>
+          </a:xfrm>
+          <a:prstGeom prst="rect">
+            <a:avLst/>
+          </a:prstGeom>
+          <a:noFill/>
+        </p:spPr>
+        <p:txBody>
+          <a:bodyPr wrap="square" lIns="0" tIns="0" rIns="0" bIns="0" rtlCol="0">
+            <a:spAutoFit/>
+          </a:bodyPr>
+          <a:lstStyle/>
+          <a:p>
+            <a:pPr algn="ctr"/>
+            <a:r>
+              <a:rPr lang="en-US" sz="3000" dirty="0"/>
+              <a:t>B</a:t>
+            </a:r>
+          </a:p>
+        </p:txBody>
+      </p:sp>
+      <p:sp>
+        <p:nvSpPr>
+          <p:cNvPr id="16" name="TextBox 15">
+            <a:extLst>
+              <a:ext uri="{FF2B5EF4-FFF2-40B4-BE49-F238E27FC236}">
+                <a16:creationId xmlns:a16="http://schemas.microsoft.com/office/drawing/2014/main" id="{422009B0-9CA5-FB9C-8D10-77C35970F205}"/>
+              </a:ext>
+            </a:extLst>
+          </p:cNvPr>
+          <p:cNvSpPr txBox="1"/>
+          <p:nvPr/>
+        </p:nvSpPr>
+        <p:spPr>
+          <a:xfrm>
+            <a:off x="3733800" y="2421751"/>
+            <a:ext cx="666750" cy="461665"/>
+          </a:xfrm>
+          <a:prstGeom prst="rect">
+            <a:avLst/>
+          </a:prstGeom>
+          <a:noFill/>
+        </p:spPr>
+        <p:txBody>
+          <a:bodyPr wrap="square" lIns="0" tIns="0" rIns="0" bIns="0" rtlCol="0">
+            <a:spAutoFit/>
+          </a:bodyPr>
+          <a:lstStyle/>
+          <a:p>
+            <a:pPr algn="ctr"/>
+            <a:r>
+              <a:rPr lang="en-US" sz="3000" dirty="0"/>
+              <a:t>C’</a:t>
+            </a:r>
+          </a:p>
+        </p:txBody>
+      </p:sp>
+      <p:sp>
+        <p:nvSpPr>
+          <p:cNvPr id="17" name="TextBox 16">
+            <a:extLst>
+              <a:ext uri="{FF2B5EF4-FFF2-40B4-BE49-F238E27FC236}">
+                <a16:creationId xmlns:a16="http://schemas.microsoft.com/office/drawing/2014/main" id="{72B42FAF-6B31-3098-0D1F-CD609AC6BFB5}"/>
+              </a:ext>
+            </a:extLst>
+          </p:cNvPr>
+          <p:cNvSpPr txBox="1"/>
+          <p:nvPr/>
+        </p:nvSpPr>
+        <p:spPr>
+          <a:xfrm>
+            <a:off x="5715000" y="859651"/>
+            <a:ext cx="387349" cy="461665"/>
+          </a:xfrm>
+          <a:prstGeom prst="rect">
+            <a:avLst/>
+          </a:prstGeom>
+          <a:noFill/>
+        </p:spPr>
+        <p:txBody>
+          <a:bodyPr wrap="square" lIns="0" tIns="0" rIns="0" bIns="0" rtlCol="0">
+            <a:spAutoFit/>
+          </a:bodyPr>
+          <a:lstStyle/>
+          <a:p>
+            <a:pPr algn="ctr"/>
+            <a:r>
+              <a:rPr lang="en-US" sz="3000" dirty="0"/>
+              <a:t>T’</a:t>
+            </a:r>
+          </a:p>
+        </p:txBody>
+      </p:sp>
+      <p:cxnSp>
+        <p:nvCxnSpPr>
+          <p:cNvPr id="18" name="Straight Connector 17">
+            <a:extLst>
+              <a:ext uri="{FF2B5EF4-FFF2-40B4-BE49-F238E27FC236}">
+                <a16:creationId xmlns:a16="http://schemas.microsoft.com/office/drawing/2014/main" id="{2AF988D6-D8D4-8575-4A04-40368F93B9EC}"/>
+              </a:ext>
+            </a:extLst>
+          </p:cNvPr>
+          <p:cNvCxnSpPr>
+            <a:cxnSpLocks/>
+          </p:cNvCxnSpPr>
+          <p:nvPr/>
+        </p:nvCxnSpPr>
+        <p:spPr>
+          <a:xfrm>
+            <a:off x="1971676" y="4867275"/>
+            <a:ext cx="2295523" cy="0"/>
+          </a:xfrm>
+          <a:prstGeom prst="line">
+            <a:avLst/>
+          </a:prstGeom>
+          <a:ln w="38100">
+            <a:prstDash val="dash"/>
+          </a:ln>
+        </p:spPr>
+        <p:style>
+          <a:lnRef idx="2">
+            <a:schemeClr val="accent1"/>
+          </a:lnRef>
+          <a:fillRef idx="0">
+            <a:schemeClr val="accent1"/>
+          </a:fillRef>
+          <a:effectRef idx="1">
+            <a:schemeClr val="accent1"/>
+          </a:effectRef>
+          <a:fontRef idx="minor">
+            <a:schemeClr val="tx1"/>
+          </a:fontRef>
+        </p:style>
+      </p:cxnSp>
+      <p:sp>
+        <p:nvSpPr>
+          <p:cNvPr id="20" name="TextBox 19">
+            <a:extLst>
+              <a:ext uri="{FF2B5EF4-FFF2-40B4-BE49-F238E27FC236}">
+                <a16:creationId xmlns:a16="http://schemas.microsoft.com/office/drawing/2014/main" id="{67F4DBA7-1204-78A4-0C52-F0BD09033A1F}"/>
+              </a:ext>
+            </a:extLst>
+          </p:cNvPr>
+          <p:cNvSpPr txBox="1"/>
+          <p:nvPr/>
+        </p:nvSpPr>
+        <p:spPr>
+          <a:xfrm>
+            <a:off x="3151187" y="4121587"/>
+            <a:ext cx="1063624" cy="461665"/>
+          </a:xfrm>
+          <a:prstGeom prst="rect">
+            <a:avLst/>
+          </a:prstGeom>
+          <a:noFill/>
+        </p:spPr>
+        <p:txBody>
+          <a:bodyPr wrap="square" lIns="0" tIns="0" rIns="0" bIns="0" rtlCol="0">
+            <a:spAutoFit/>
+          </a:bodyPr>
+          <a:lstStyle/>
+          <a:p>
+            <a:pPr algn="ctr"/>
+            <a:r>
+              <a:rPr lang="el-GR" sz="3000" dirty="0"/>
+              <a:t>θ</a:t>
+            </a:r>
+            <a:r>
+              <a:rPr lang="en-US" sz="3000" baseline="-25000" dirty="0"/>
+              <a:t>a</a:t>
+            </a:r>
+          </a:p>
+        </p:txBody>
+      </p:sp>
+      <p:cxnSp>
+        <p:nvCxnSpPr>
+          <p:cNvPr id="35" name="Straight Connector 34">
+            <a:extLst>
+              <a:ext uri="{FF2B5EF4-FFF2-40B4-BE49-F238E27FC236}">
+                <a16:creationId xmlns:a16="http://schemas.microsoft.com/office/drawing/2014/main" id="{986DEF41-5E3E-D76E-6049-443742BE4A06}"/>
+              </a:ext>
+            </a:extLst>
+          </p:cNvPr>
+          <p:cNvCxnSpPr>
+            <a:cxnSpLocks/>
+          </p:cNvCxnSpPr>
+          <p:nvPr/>
+        </p:nvCxnSpPr>
+        <p:spPr>
+          <a:xfrm flipV="1">
+            <a:off x="12660578" y="4890276"/>
+            <a:ext cx="0" cy="2387600"/>
+          </a:xfrm>
+          <a:prstGeom prst="line">
+            <a:avLst/>
+          </a:prstGeom>
+          <a:ln w="76200">
+            <a:solidFill>
+              <a:schemeClr val="accent2">
+                <a:lumMod val="75000"/>
+              </a:schemeClr>
+            </a:solidFill>
+          </a:ln>
+        </p:spPr>
+        <p:style>
+          <a:lnRef idx="2">
+            <a:schemeClr val="accent1"/>
+          </a:lnRef>
+          <a:fillRef idx="0">
+            <a:schemeClr val="accent1"/>
+          </a:fillRef>
+          <a:effectRef idx="1">
+            <a:schemeClr val="accent1"/>
+          </a:effectRef>
+          <a:fontRef idx="minor">
+            <a:schemeClr val="tx1"/>
+          </a:fontRef>
+        </p:style>
+      </p:cxnSp>
+      <p:cxnSp>
+        <p:nvCxnSpPr>
+          <p:cNvPr id="36" name="Straight Connector 35">
+            <a:extLst>
+              <a:ext uri="{FF2B5EF4-FFF2-40B4-BE49-F238E27FC236}">
+                <a16:creationId xmlns:a16="http://schemas.microsoft.com/office/drawing/2014/main" id="{C14C8921-ABF2-D28F-A765-E5B231431A81}"/>
+              </a:ext>
+            </a:extLst>
+          </p:cNvPr>
+          <p:cNvCxnSpPr>
+            <a:cxnSpLocks/>
+          </p:cNvCxnSpPr>
+          <p:nvPr/>
+        </p:nvCxnSpPr>
+        <p:spPr>
+          <a:xfrm flipV="1">
+            <a:off x="12660578" y="3455176"/>
+            <a:ext cx="0" cy="1435100"/>
+          </a:xfrm>
+          <a:prstGeom prst="line">
+            <a:avLst/>
+          </a:prstGeom>
+          <a:ln w="76200">
+            <a:solidFill>
+              <a:schemeClr val="accent2">
+                <a:lumMod val="75000"/>
+              </a:schemeClr>
+            </a:solidFill>
+          </a:ln>
+        </p:spPr>
+        <p:style>
+          <a:lnRef idx="2">
+            <a:schemeClr val="accent1"/>
+          </a:lnRef>
+          <a:fillRef idx="0">
+            <a:schemeClr val="accent1"/>
+          </a:fillRef>
+          <a:effectRef idx="1">
+            <a:schemeClr val="accent1"/>
+          </a:effectRef>
+          <a:fontRef idx="minor">
+            <a:schemeClr val="tx1"/>
+          </a:fontRef>
+        </p:style>
+      </p:cxnSp>
+      <p:cxnSp>
+        <p:nvCxnSpPr>
+          <p:cNvPr id="37" name="Straight Connector 36">
+            <a:extLst>
+              <a:ext uri="{FF2B5EF4-FFF2-40B4-BE49-F238E27FC236}">
+                <a16:creationId xmlns:a16="http://schemas.microsoft.com/office/drawing/2014/main" id="{F3787F6A-0461-757D-B789-1CBDA3922D20}"/>
+              </a:ext>
+            </a:extLst>
+          </p:cNvPr>
+          <p:cNvCxnSpPr>
+            <a:cxnSpLocks/>
+          </p:cNvCxnSpPr>
+          <p:nvPr/>
+        </p:nvCxnSpPr>
+        <p:spPr>
+          <a:xfrm flipV="1">
+            <a:off x="12660577" y="2020076"/>
+            <a:ext cx="3352801" cy="1435100"/>
+          </a:xfrm>
+          <a:prstGeom prst="line">
+            <a:avLst/>
+          </a:prstGeom>
+          <a:ln w="76200">
+            <a:solidFill>
+              <a:schemeClr val="accent2">
+                <a:lumMod val="75000"/>
+              </a:schemeClr>
+            </a:solidFill>
+          </a:ln>
+        </p:spPr>
+        <p:style>
+          <a:lnRef idx="2">
+            <a:schemeClr val="accent1"/>
+          </a:lnRef>
+          <a:fillRef idx="0">
+            <a:schemeClr val="accent1"/>
+          </a:fillRef>
+          <a:effectRef idx="1">
+            <a:schemeClr val="accent1"/>
+          </a:effectRef>
+          <a:fontRef idx="minor">
+            <a:schemeClr val="tx1"/>
+          </a:fontRef>
+        </p:style>
+      </p:cxnSp>
+      <p:cxnSp>
+        <p:nvCxnSpPr>
+          <p:cNvPr id="38" name="Straight Connector 37">
+            <a:extLst>
+              <a:ext uri="{FF2B5EF4-FFF2-40B4-BE49-F238E27FC236}">
+                <a16:creationId xmlns:a16="http://schemas.microsoft.com/office/drawing/2014/main" id="{1A95E54B-5553-1CC2-6A82-42BE3C01556E}"/>
+              </a:ext>
+            </a:extLst>
+          </p:cNvPr>
+          <p:cNvCxnSpPr>
+            <a:cxnSpLocks/>
+          </p:cNvCxnSpPr>
+          <p:nvPr/>
+        </p:nvCxnSpPr>
+        <p:spPr>
+          <a:xfrm flipH="1" flipV="1">
+            <a:off x="13632128" y="584976"/>
+            <a:ext cx="2381250" cy="1435100"/>
+          </a:xfrm>
+          <a:prstGeom prst="line">
+            <a:avLst/>
+          </a:prstGeom>
+          <a:ln w="76200">
+            <a:solidFill>
+              <a:schemeClr val="accent2">
+                <a:lumMod val="75000"/>
+              </a:schemeClr>
+            </a:solidFill>
+          </a:ln>
+        </p:spPr>
+        <p:style>
+          <a:lnRef idx="2">
+            <a:schemeClr val="accent1"/>
+          </a:lnRef>
+          <a:fillRef idx="0">
+            <a:schemeClr val="accent1"/>
+          </a:fillRef>
+          <a:effectRef idx="1">
+            <a:schemeClr val="accent1"/>
+          </a:effectRef>
+          <a:fontRef idx="minor">
+            <a:schemeClr val="tx1"/>
+          </a:fontRef>
+        </p:style>
+      </p:cxnSp>
+      <p:sp>
+        <p:nvSpPr>
+          <p:cNvPr id="39" name="Oval 38">
+            <a:extLst>
+              <a:ext uri="{FF2B5EF4-FFF2-40B4-BE49-F238E27FC236}">
+                <a16:creationId xmlns:a16="http://schemas.microsoft.com/office/drawing/2014/main" id="{0E7C6C33-C606-AEE8-2271-0CB84C8E04C3}"/>
+              </a:ext>
+            </a:extLst>
+          </p:cNvPr>
+          <p:cNvSpPr/>
+          <p:nvPr/>
+        </p:nvSpPr>
+        <p:spPr>
+          <a:xfrm>
+            <a:off x="12489127" y="4718826"/>
+            <a:ext cx="342900" cy="342900"/>
+          </a:xfrm>
+          <a:prstGeom prst="ellipse">
+            <a:avLst/>
+          </a:prstGeom>
+          <a:solidFill>
+            <a:schemeClr val="tx1"/>
+          </a:solidFill>
+          <a:ln>
+            <a:noFill/>
+          </a:ln>
+        </p:spPr>
+        <p:style>
+          <a:lnRef idx="2">
+            <a:schemeClr val="accent1">
+              <a:shade val="15000"/>
+            </a:schemeClr>
+          </a:lnRef>
+          <a:fillRef idx="1">
+            <a:schemeClr val="accent1"/>
+          </a:fillRef>
+          <a:effectRef idx="0">
+            <a:schemeClr val="accent1"/>
+          </a:effectRef>
+          <a:fontRef idx="minor">
+            <a:schemeClr val="lt1"/>
+          </a:fontRef>
+        </p:style>
+        <p:txBody>
+          <a:bodyPr rtlCol="0" anchor="ctr"/>
+          <a:lstStyle/>
+          <a:p>
+            <a:pPr algn="ctr"/>
+            <a:endParaRPr lang="en-US" sz="3000"/>
+          </a:p>
+        </p:txBody>
+      </p:sp>
+      <p:sp>
+        <p:nvSpPr>
+          <p:cNvPr id="40" name="Oval 39">
+            <a:extLst>
+              <a:ext uri="{FF2B5EF4-FFF2-40B4-BE49-F238E27FC236}">
+                <a16:creationId xmlns:a16="http://schemas.microsoft.com/office/drawing/2014/main" id="{12DC486E-2D2C-2F50-4236-BCE081ED5C88}"/>
+              </a:ext>
+            </a:extLst>
+          </p:cNvPr>
+          <p:cNvSpPr/>
+          <p:nvPr/>
+        </p:nvSpPr>
+        <p:spPr>
+          <a:xfrm>
+            <a:off x="12489127" y="3283726"/>
+            <a:ext cx="342900" cy="342900"/>
+          </a:xfrm>
+          <a:prstGeom prst="ellipse">
+            <a:avLst/>
+          </a:prstGeom>
+          <a:solidFill>
+            <a:schemeClr val="accent5">
+              <a:lumMod val="40000"/>
+              <a:lumOff val="60000"/>
+            </a:schemeClr>
+          </a:solidFill>
+          <a:ln>
+            <a:noFill/>
+          </a:ln>
+        </p:spPr>
+        <p:style>
+          <a:lnRef idx="2">
+            <a:schemeClr val="accent1">
+              <a:shade val="15000"/>
+            </a:schemeClr>
+          </a:lnRef>
+          <a:fillRef idx="1">
+            <a:schemeClr val="accent1"/>
+          </a:fillRef>
+          <a:effectRef idx="0">
+            <a:schemeClr val="accent1"/>
+          </a:effectRef>
+          <a:fontRef idx="minor">
+            <a:schemeClr val="lt1"/>
+          </a:fontRef>
+        </p:style>
+        <p:txBody>
+          <a:bodyPr rtlCol="0" anchor="ctr"/>
+          <a:lstStyle/>
+          <a:p>
+            <a:pPr algn="ctr"/>
+            <a:endParaRPr lang="en-US" sz="3000" dirty="0"/>
+          </a:p>
+        </p:txBody>
+      </p:sp>
+      <p:sp>
+        <p:nvSpPr>
+          <p:cNvPr id="41" name="Oval 40">
+            <a:extLst>
+              <a:ext uri="{FF2B5EF4-FFF2-40B4-BE49-F238E27FC236}">
+                <a16:creationId xmlns:a16="http://schemas.microsoft.com/office/drawing/2014/main" id="{E333D42C-BC5F-DA96-79D1-5897EAB9880A}"/>
+              </a:ext>
+            </a:extLst>
+          </p:cNvPr>
+          <p:cNvSpPr/>
+          <p:nvPr/>
+        </p:nvSpPr>
+        <p:spPr>
+          <a:xfrm>
+            <a:off x="15841928" y="1848626"/>
+            <a:ext cx="342900" cy="342900"/>
+          </a:xfrm>
+          <a:prstGeom prst="ellipse">
+            <a:avLst/>
+          </a:prstGeom>
+          <a:solidFill>
+            <a:schemeClr val="accent6">
+              <a:lumMod val="60000"/>
+              <a:lumOff val="40000"/>
+            </a:schemeClr>
+          </a:solidFill>
+          <a:ln>
+            <a:noFill/>
+          </a:ln>
+        </p:spPr>
+        <p:style>
+          <a:lnRef idx="2">
+            <a:schemeClr val="accent1">
+              <a:shade val="15000"/>
+            </a:schemeClr>
+          </a:lnRef>
+          <a:fillRef idx="1">
+            <a:schemeClr val="accent1"/>
+          </a:fillRef>
+          <a:effectRef idx="0">
+            <a:schemeClr val="accent1"/>
+          </a:effectRef>
+          <a:fontRef idx="minor">
+            <a:schemeClr val="lt1"/>
+          </a:fontRef>
+        </p:style>
+        <p:txBody>
+          <a:bodyPr rtlCol="0" anchor="ctr"/>
+          <a:lstStyle/>
+          <a:p>
+            <a:pPr algn="ctr"/>
+            <a:endParaRPr lang="en-US" sz="3000"/>
+          </a:p>
+        </p:txBody>
+      </p:sp>
+      <p:sp>
+        <p:nvSpPr>
+          <p:cNvPr id="42" name="Oval 41">
+            <a:extLst>
+              <a:ext uri="{FF2B5EF4-FFF2-40B4-BE49-F238E27FC236}">
+                <a16:creationId xmlns:a16="http://schemas.microsoft.com/office/drawing/2014/main" id="{43BD006B-B735-16CE-A983-D86D521E2C29}"/>
+              </a:ext>
+            </a:extLst>
+          </p:cNvPr>
+          <p:cNvSpPr/>
+          <p:nvPr/>
+        </p:nvSpPr>
+        <p:spPr>
+          <a:xfrm>
+            <a:off x="13460678" y="413526"/>
+            <a:ext cx="342900" cy="342900"/>
+          </a:xfrm>
+          <a:prstGeom prst="ellipse">
+            <a:avLst/>
+          </a:prstGeom>
+          <a:solidFill>
+            <a:srgbClr val="FF0000"/>
+          </a:solidFill>
+          <a:ln>
+            <a:noFill/>
+          </a:ln>
+        </p:spPr>
+        <p:style>
+          <a:lnRef idx="2">
+            <a:schemeClr val="accent1">
+              <a:shade val="15000"/>
+            </a:schemeClr>
+          </a:lnRef>
+          <a:fillRef idx="1">
+            <a:schemeClr val="accent1"/>
+          </a:fillRef>
+          <a:effectRef idx="0">
+            <a:schemeClr val="accent1"/>
+          </a:effectRef>
+          <a:fontRef idx="minor">
+            <a:schemeClr val="lt1"/>
+          </a:fontRef>
+        </p:style>
+        <p:txBody>
+          <a:bodyPr rtlCol="0" anchor="ctr"/>
+          <a:lstStyle/>
+          <a:p>
+            <a:pPr algn="ctr"/>
+            <a:endParaRPr lang="en-US" sz="3000"/>
+          </a:p>
+        </p:txBody>
+      </p:sp>
+      <p:sp>
+        <p:nvSpPr>
+          <p:cNvPr id="43" name="TextBox 42">
+            <a:extLst>
+              <a:ext uri="{FF2B5EF4-FFF2-40B4-BE49-F238E27FC236}">
+                <a16:creationId xmlns:a16="http://schemas.microsoft.com/office/drawing/2014/main" id="{513D2C51-488A-5B2D-CC23-6DE62F18BC71}"/>
+              </a:ext>
+            </a:extLst>
+          </p:cNvPr>
+          <p:cNvSpPr txBox="1"/>
+          <p:nvPr/>
+        </p:nvSpPr>
+        <p:spPr>
+          <a:xfrm>
+            <a:off x="12105258" y="5892831"/>
+            <a:ext cx="266699" cy="461665"/>
+          </a:xfrm>
+          <a:prstGeom prst="rect">
+            <a:avLst/>
+          </a:prstGeom>
+          <a:noFill/>
+        </p:spPr>
+        <p:txBody>
+          <a:bodyPr wrap="square" lIns="0" tIns="0" rIns="0" bIns="0" rtlCol="0">
+            <a:spAutoFit/>
+          </a:bodyPr>
+          <a:lstStyle/>
+          <a:p>
+            <a:pPr algn="ctr"/>
+            <a:r>
+              <a:rPr lang="en-US" sz="3000" dirty="0"/>
+              <a:t>A</a:t>
+            </a:r>
+          </a:p>
+        </p:txBody>
+      </p:sp>
+      <p:sp>
+        <p:nvSpPr>
+          <p:cNvPr id="44" name="TextBox 43">
+            <a:extLst>
+              <a:ext uri="{FF2B5EF4-FFF2-40B4-BE49-F238E27FC236}">
+                <a16:creationId xmlns:a16="http://schemas.microsoft.com/office/drawing/2014/main" id="{97ADCB76-74D5-34E1-D654-CCDC22C6BFD3}"/>
+              </a:ext>
+            </a:extLst>
+          </p:cNvPr>
+          <p:cNvSpPr txBox="1"/>
+          <p:nvPr/>
+        </p:nvSpPr>
+        <p:spPr>
+          <a:xfrm>
+            <a:off x="11911190" y="4034226"/>
+            <a:ext cx="594809" cy="461665"/>
+          </a:xfrm>
+          <a:prstGeom prst="rect">
+            <a:avLst/>
+          </a:prstGeom>
+          <a:noFill/>
+        </p:spPr>
+        <p:txBody>
+          <a:bodyPr wrap="square" lIns="0" tIns="0" rIns="0" bIns="0" rtlCol="0">
+            <a:spAutoFit/>
+          </a:bodyPr>
+          <a:lstStyle/>
+          <a:p>
+            <a:pPr algn="ctr"/>
+            <a:r>
+              <a:rPr lang="en-US" sz="3000" dirty="0"/>
+              <a:t>B</a:t>
+            </a:r>
+          </a:p>
+        </p:txBody>
+      </p:sp>
+      <p:sp>
+        <p:nvSpPr>
+          <p:cNvPr id="45" name="TextBox 44">
+            <a:extLst>
+              <a:ext uri="{FF2B5EF4-FFF2-40B4-BE49-F238E27FC236}">
+                <a16:creationId xmlns:a16="http://schemas.microsoft.com/office/drawing/2014/main" id="{92482916-82E5-4079-2CE8-02BA2349D379}"/>
+              </a:ext>
+            </a:extLst>
+          </p:cNvPr>
+          <p:cNvSpPr txBox="1"/>
+          <p:nvPr/>
+        </p:nvSpPr>
+        <p:spPr>
+          <a:xfrm>
+            <a:off x="12832027" y="2715790"/>
+            <a:ext cx="596901" cy="461665"/>
+          </a:xfrm>
+          <a:prstGeom prst="rect">
+            <a:avLst/>
+          </a:prstGeom>
+          <a:noFill/>
+        </p:spPr>
+        <p:txBody>
+          <a:bodyPr wrap="square" lIns="0" tIns="0" rIns="0" bIns="0" rtlCol="0">
+            <a:spAutoFit/>
+          </a:bodyPr>
+          <a:lstStyle/>
+          <a:p>
+            <a:pPr algn="ctr"/>
+            <a:r>
+              <a:rPr lang="en-US" sz="3000" dirty="0"/>
+              <a:t>C</a:t>
+            </a:r>
+          </a:p>
+        </p:txBody>
+      </p:sp>
+      <p:sp>
+        <p:nvSpPr>
+          <p:cNvPr id="46" name="TextBox 45">
+            <a:extLst>
+              <a:ext uri="{FF2B5EF4-FFF2-40B4-BE49-F238E27FC236}">
+                <a16:creationId xmlns:a16="http://schemas.microsoft.com/office/drawing/2014/main" id="{C69FE073-CBDC-EE1E-C30F-EDD2E32821E6}"/>
+              </a:ext>
+            </a:extLst>
+          </p:cNvPr>
+          <p:cNvSpPr txBox="1"/>
+          <p:nvPr/>
+        </p:nvSpPr>
+        <p:spPr>
+          <a:xfrm>
+            <a:off x="14756077" y="891403"/>
+            <a:ext cx="635000" cy="461665"/>
+          </a:xfrm>
+          <a:prstGeom prst="rect">
+            <a:avLst/>
+          </a:prstGeom>
+          <a:noFill/>
+        </p:spPr>
+        <p:txBody>
+          <a:bodyPr wrap="square" lIns="0" tIns="0" rIns="0" bIns="0" rtlCol="0">
+            <a:spAutoFit/>
+          </a:bodyPr>
+          <a:lstStyle/>
+          <a:p>
+            <a:pPr algn="ctr"/>
+            <a:r>
+              <a:rPr lang="en-US" sz="3000" dirty="0"/>
+              <a:t>T</a:t>
+            </a:r>
+          </a:p>
+        </p:txBody>
+      </p:sp>
+      <p:cxnSp>
+        <p:nvCxnSpPr>
+          <p:cNvPr id="59" name="Straight Connector 58">
+            <a:extLst>
+              <a:ext uri="{FF2B5EF4-FFF2-40B4-BE49-F238E27FC236}">
+                <a16:creationId xmlns:a16="http://schemas.microsoft.com/office/drawing/2014/main" id="{542722DA-92D1-C4DB-ECB4-1383487F1A13}"/>
+              </a:ext>
+            </a:extLst>
+          </p:cNvPr>
+          <p:cNvCxnSpPr>
+            <a:cxnSpLocks/>
+          </p:cNvCxnSpPr>
+          <p:nvPr/>
+        </p:nvCxnSpPr>
+        <p:spPr>
+          <a:xfrm>
+            <a:off x="12778054" y="3455176"/>
+            <a:ext cx="3200543" cy="0"/>
+          </a:xfrm>
+          <a:prstGeom prst="line">
+            <a:avLst/>
+          </a:prstGeom>
+          <a:ln w="38100">
+            <a:prstDash val="dash"/>
+          </a:ln>
+        </p:spPr>
+        <p:style>
+          <a:lnRef idx="2">
+            <a:schemeClr val="accent1"/>
+          </a:lnRef>
+          <a:fillRef idx="0">
+            <a:schemeClr val="accent1"/>
+          </a:fillRef>
+          <a:effectRef idx="1">
+            <a:schemeClr val="accent1"/>
+          </a:effectRef>
+          <a:fontRef idx="minor">
+            <a:schemeClr val="tx1"/>
+          </a:fontRef>
+        </p:style>
+      </p:cxnSp>
+      <p:sp>
+        <p:nvSpPr>
+          <p:cNvPr id="60" name="TextBox 59">
+            <a:extLst>
+              <a:ext uri="{FF2B5EF4-FFF2-40B4-BE49-F238E27FC236}">
+                <a16:creationId xmlns:a16="http://schemas.microsoft.com/office/drawing/2014/main" id="{857AE346-A988-4821-991C-9261577A343A}"/>
+              </a:ext>
+            </a:extLst>
+          </p:cNvPr>
+          <p:cNvSpPr txBox="1"/>
+          <p:nvPr/>
+        </p:nvSpPr>
+        <p:spPr>
+          <a:xfrm>
+            <a:off x="14639097" y="2795056"/>
+            <a:ext cx="1063624" cy="461665"/>
+          </a:xfrm>
+          <a:prstGeom prst="rect">
+            <a:avLst/>
+          </a:prstGeom>
+          <a:noFill/>
+        </p:spPr>
+        <p:txBody>
+          <a:bodyPr wrap="square" lIns="0" tIns="0" rIns="0" bIns="0" rtlCol="0">
+            <a:spAutoFit/>
+          </a:bodyPr>
+          <a:lstStyle/>
+          <a:p>
+            <a:pPr algn="ctr"/>
+            <a:r>
+              <a:rPr lang="el-GR" sz="3000" dirty="0"/>
+              <a:t>θ</a:t>
+            </a:r>
+            <a:r>
+              <a:rPr lang="en-US" sz="3000" baseline="-25000" dirty="0"/>
+              <a:t>b</a:t>
+            </a:r>
+          </a:p>
+        </p:txBody>
+      </p:sp>
+      <p:sp>
+        <p:nvSpPr>
+          <p:cNvPr id="62" name="TextBox 61">
+            <a:extLst>
+              <a:ext uri="{FF2B5EF4-FFF2-40B4-BE49-F238E27FC236}">
+                <a16:creationId xmlns:a16="http://schemas.microsoft.com/office/drawing/2014/main" id="{F2F05FAB-147B-522D-3AAD-88D37FC7880E}"/>
+              </a:ext>
+            </a:extLst>
+          </p:cNvPr>
+          <p:cNvSpPr txBox="1"/>
+          <p:nvPr/>
+        </p:nvSpPr>
+        <p:spPr>
+          <a:xfrm>
+            <a:off x="13344770" y="1387574"/>
+            <a:ext cx="1063624" cy="461665"/>
+          </a:xfrm>
+          <a:prstGeom prst="rect">
+            <a:avLst/>
+          </a:prstGeom>
+          <a:noFill/>
+        </p:spPr>
+        <p:txBody>
+          <a:bodyPr wrap="square" lIns="0" tIns="0" rIns="0" bIns="0" rtlCol="0">
+            <a:spAutoFit/>
+          </a:bodyPr>
+          <a:lstStyle/>
+          <a:p>
+            <a:pPr algn="ctr"/>
+            <a:r>
+              <a:rPr lang="el-GR" sz="3000" dirty="0"/>
+              <a:t>θ</a:t>
+            </a:r>
+            <a:r>
+              <a:rPr lang="en-US" sz="3000" baseline="-25000" dirty="0"/>
+              <a:t>c</a:t>
+            </a:r>
+          </a:p>
+        </p:txBody>
+      </p:sp>
+      <p:grpSp>
+        <p:nvGrpSpPr>
+          <p:cNvPr id="74" name="Group 73">
+            <a:extLst>
+              <a:ext uri="{FF2B5EF4-FFF2-40B4-BE49-F238E27FC236}">
+                <a16:creationId xmlns:a16="http://schemas.microsoft.com/office/drawing/2014/main" id="{2F248ECE-0C9F-E63E-E054-B26FFD4245CE}"/>
+              </a:ext>
+            </a:extLst>
+          </p:cNvPr>
+          <p:cNvGrpSpPr/>
+          <p:nvPr/>
+        </p:nvGrpSpPr>
+        <p:grpSpPr>
+          <a:xfrm>
+            <a:off x="2057399" y="7577524"/>
+            <a:ext cx="5033963" cy="298042"/>
+            <a:chOff x="2057399" y="7577524"/>
+            <a:chExt cx="5033963" cy="298042"/>
+          </a:xfrm>
+        </p:grpSpPr>
+        <p:cxnSp>
+          <p:nvCxnSpPr>
+            <p:cNvPr id="63" name="Straight Connector 62">
+              <a:extLst>
+                <a:ext uri="{FF2B5EF4-FFF2-40B4-BE49-F238E27FC236}">
+                  <a16:creationId xmlns:a16="http://schemas.microsoft.com/office/drawing/2014/main" id="{EF54E844-B60E-5B05-C1B9-E7F457A9A9CF}"/>
+                </a:ext>
+              </a:extLst>
+            </p:cNvPr>
+            <p:cNvCxnSpPr>
+              <a:cxnSpLocks/>
+            </p:cNvCxnSpPr>
+            <p:nvPr/>
+          </p:nvCxnSpPr>
+          <p:spPr>
+            <a:xfrm>
+              <a:off x="2057400" y="7720399"/>
+              <a:ext cx="5029200" cy="0"/>
+            </a:xfrm>
+            <a:prstGeom prst="line">
+              <a:avLst/>
+            </a:prstGeom>
+            <a:ln w="76200">
+              <a:solidFill>
+                <a:schemeClr val="tx1"/>
+              </a:solidFill>
+            </a:ln>
+          </p:spPr>
+          <p:style>
+            <a:lnRef idx="2">
+              <a:schemeClr val="accent1"/>
+            </a:lnRef>
+            <a:fillRef idx="0">
+              <a:schemeClr val="accent1"/>
+            </a:fillRef>
+            <a:effectRef idx="1">
+              <a:schemeClr val="accent1"/>
+            </a:effectRef>
+            <a:fontRef idx="minor">
+              <a:schemeClr val="tx1"/>
+            </a:fontRef>
+          </p:style>
+        </p:cxnSp>
+        <p:cxnSp>
+          <p:nvCxnSpPr>
+            <p:cNvPr id="65" name="Straight Connector 64">
+              <a:extLst>
+                <a:ext uri="{FF2B5EF4-FFF2-40B4-BE49-F238E27FC236}">
+                  <a16:creationId xmlns:a16="http://schemas.microsoft.com/office/drawing/2014/main" id="{3E48DB8C-21C9-7A9F-EEB9-12A66A4E12E4}"/>
+                </a:ext>
+              </a:extLst>
+            </p:cNvPr>
+            <p:cNvCxnSpPr>
+              <a:cxnSpLocks/>
+            </p:cNvCxnSpPr>
+            <p:nvPr/>
+          </p:nvCxnSpPr>
+          <p:spPr>
+            <a:xfrm flipV="1">
+              <a:off x="7091362" y="7577524"/>
+              <a:ext cx="0" cy="285750"/>
+            </a:xfrm>
+            <a:prstGeom prst="line">
+              <a:avLst/>
+            </a:prstGeom>
+            <a:ln w="76200">
+              <a:solidFill>
+                <a:schemeClr val="tx1"/>
+              </a:solidFill>
+            </a:ln>
+          </p:spPr>
+          <p:style>
+            <a:lnRef idx="2">
+              <a:schemeClr val="accent1"/>
+            </a:lnRef>
+            <a:fillRef idx="0">
+              <a:schemeClr val="accent1"/>
+            </a:fillRef>
+            <a:effectRef idx="1">
+              <a:schemeClr val="accent1"/>
+            </a:effectRef>
+            <a:fontRef idx="minor">
+              <a:schemeClr val="tx1"/>
+            </a:fontRef>
+          </p:style>
+        </p:cxnSp>
+        <p:cxnSp>
+          <p:nvCxnSpPr>
+            <p:cNvPr id="69" name="Straight Connector 68">
+              <a:extLst>
+                <a:ext uri="{FF2B5EF4-FFF2-40B4-BE49-F238E27FC236}">
+                  <a16:creationId xmlns:a16="http://schemas.microsoft.com/office/drawing/2014/main" id="{09F07711-3C96-056D-329F-A1AF0B8F8098}"/>
+                </a:ext>
+              </a:extLst>
+            </p:cNvPr>
+            <p:cNvCxnSpPr>
+              <a:cxnSpLocks/>
+            </p:cNvCxnSpPr>
+            <p:nvPr/>
+          </p:nvCxnSpPr>
+          <p:spPr>
+            <a:xfrm flipV="1">
+              <a:off x="2057399" y="7589816"/>
+              <a:ext cx="0" cy="285750"/>
+            </a:xfrm>
+            <a:prstGeom prst="line">
+              <a:avLst/>
+            </a:prstGeom>
+            <a:ln w="76200">
+              <a:solidFill>
+                <a:schemeClr val="tx1"/>
+              </a:solidFill>
+            </a:ln>
+          </p:spPr>
+          <p:style>
+            <a:lnRef idx="2">
+              <a:schemeClr val="accent1"/>
+            </a:lnRef>
+            <a:fillRef idx="0">
+              <a:schemeClr val="accent1"/>
+            </a:fillRef>
+            <a:effectRef idx="1">
+              <a:schemeClr val="accent1"/>
+            </a:effectRef>
+            <a:fontRef idx="minor">
+              <a:schemeClr val="tx1"/>
+            </a:fontRef>
+          </p:style>
+        </p:cxnSp>
+      </p:grpSp>
+      <p:grpSp>
+        <p:nvGrpSpPr>
+          <p:cNvPr id="75" name="Group 74">
+            <a:extLst>
+              <a:ext uri="{FF2B5EF4-FFF2-40B4-BE49-F238E27FC236}">
+                <a16:creationId xmlns:a16="http://schemas.microsoft.com/office/drawing/2014/main" id="{C84E0207-6BD2-9D6D-3AC9-7902DB27C22F}"/>
+              </a:ext>
+            </a:extLst>
+          </p:cNvPr>
+          <p:cNvGrpSpPr/>
+          <p:nvPr/>
+        </p:nvGrpSpPr>
+        <p:grpSpPr>
+          <a:xfrm>
+            <a:off x="12660576" y="7604108"/>
+            <a:ext cx="971552" cy="298042"/>
+            <a:chOff x="2057399" y="7577524"/>
+            <a:chExt cx="5033963" cy="298042"/>
+          </a:xfrm>
+        </p:grpSpPr>
+        <p:cxnSp>
+          <p:nvCxnSpPr>
+            <p:cNvPr id="76" name="Straight Connector 75">
+              <a:extLst>
+                <a:ext uri="{FF2B5EF4-FFF2-40B4-BE49-F238E27FC236}">
+                  <a16:creationId xmlns:a16="http://schemas.microsoft.com/office/drawing/2014/main" id="{F55B86D6-6499-E00E-E515-3B2EC9FDF89B}"/>
+                </a:ext>
+              </a:extLst>
+            </p:cNvPr>
+            <p:cNvCxnSpPr>
+              <a:cxnSpLocks/>
+            </p:cNvCxnSpPr>
+            <p:nvPr/>
+          </p:nvCxnSpPr>
+          <p:spPr>
+            <a:xfrm>
+              <a:off x="2057400" y="7720399"/>
+              <a:ext cx="5029200" cy="0"/>
+            </a:xfrm>
+            <a:prstGeom prst="line">
+              <a:avLst/>
+            </a:prstGeom>
+            <a:ln w="76200">
+              <a:solidFill>
+                <a:schemeClr val="tx1"/>
+              </a:solidFill>
+            </a:ln>
+          </p:spPr>
+          <p:style>
+            <a:lnRef idx="2">
+              <a:schemeClr val="accent1"/>
+            </a:lnRef>
+            <a:fillRef idx="0">
+              <a:schemeClr val="accent1"/>
+            </a:fillRef>
+            <a:effectRef idx="1">
+              <a:schemeClr val="accent1"/>
+            </a:effectRef>
+            <a:fontRef idx="minor">
+              <a:schemeClr val="tx1"/>
+            </a:fontRef>
+          </p:style>
+        </p:cxnSp>
+        <p:cxnSp>
+          <p:nvCxnSpPr>
+            <p:cNvPr id="77" name="Straight Connector 76">
+              <a:extLst>
+                <a:ext uri="{FF2B5EF4-FFF2-40B4-BE49-F238E27FC236}">
+                  <a16:creationId xmlns:a16="http://schemas.microsoft.com/office/drawing/2014/main" id="{B37A72CA-D386-D312-A481-58359AEE5872}"/>
+                </a:ext>
+              </a:extLst>
+            </p:cNvPr>
+            <p:cNvCxnSpPr>
+              <a:cxnSpLocks/>
+            </p:cNvCxnSpPr>
+            <p:nvPr/>
+          </p:nvCxnSpPr>
+          <p:spPr>
+            <a:xfrm flipV="1">
+              <a:off x="7091362" y="7577524"/>
+              <a:ext cx="0" cy="285750"/>
+            </a:xfrm>
+            <a:prstGeom prst="line">
+              <a:avLst/>
+            </a:prstGeom>
+            <a:ln w="76200">
+              <a:solidFill>
+                <a:schemeClr val="tx1"/>
+              </a:solidFill>
+            </a:ln>
+          </p:spPr>
+          <p:style>
+            <a:lnRef idx="2">
+              <a:schemeClr val="accent1"/>
+            </a:lnRef>
+            <a:fillRef idx="0">
+              <a:schemeClr val="accent1"/>
+            </a:fillRef>
+            <a:effectRef idx="1">
+              <a:schemeClr val="accent1"/>
+            </a:effectRef>
+            <a:fontRef idx="minor">
+              <a:schemeClr val="tx1"/>
+            </a:fontRef>
+          </p:style>
+        </p:cxnSp>
+        <p:cxnSp>
+          <p:nvCxnSpPr>
+            <p:cNvPr id="78" name="Straight Connector 77">
+              <a:extLst>
+                <a:ext uri="{FF2B5EF4-FFF2-40B4-BE49-F238E27FC236}">
+                  <a16:creationId xmlns:a16="http://schemas.microsoft.com/office/drawing/2014/main" id="{ABDBFF3C-4936-C2E8-A12C-2B1151B92ADE}"/>
+                </a:ext>
+              </a:extLst>
+            </p:cNvPr>
+            <p:cNvCxnSpPr>
+              <a:cxnSpLocks/>
+            </p:cNvCxnSpPr>
+            <p:nvPr/>
+          </p:nvCxnSpPr>
+          <p:spPr>
+            <a:xfrm flipV="1">
+              <a:off x="2057399" y="7589816"/>
+              <a:ext cx="0" cy="285750"/>
+            </a:xfrm>
+            <a:prstGeom prst="line">
+              <a:avLst/>
+            </a:prstGeom>
+            <a:ln w="76200">
+              <a:solidFill>
+                <a:schemeClr val="tx1"/>
+              </a:solidFill>
+            </a:ln>
+          </p:spPr>
+          <p:style>
+            <a:lnRef idx="2">
+              <a:schemeClr val="accent1"/>
+            </a:lnRef>
+            <a:fillRef idx="0">
+              <a:schemeClr val="accent1"/>
+            </a:fillRef>
+            <a:effectRef idx="1">
+              <a:schemeClr val="accent1"/>
+            </a:effectRef>
+            <a:fontRef idx="minor">
+              <a:schemeClr val="tx1"/>
+            </a:fontRef>
+          </p:style>
+        </p:cxnSp>
+      </p:grpSp>
+      <p:grpSp>
+        <p:nvGrpSpPr>
+          <p:cNvPr id="79" name="Group 78">
+            <a:extLst>
+              <a:ext uri="{FF2B5EF4-FFF2-40B4-BE49-F238E27FC236}">
+                <a16:creationId xmlns:a16="http://schemas.microsoft.com/office/drawing/2014/main" id="{6C88A2E1-DBB9-7AB5-CD33-5C252F0ED005}"/>
+              </a:ext>
+            </a:extLst>
+          </p:cNvPr>
+          <p:cNvGrpSpPr/>
+          <p:nvPr/>
+        </p:nvGrpSpPr>
+        <p:grpSpPr>
+          <a:xfrm rot="16200000">
+            <a:off x="13603695" y="4004666"/>
+            <a:ext cx="7186592" cy="298042"/>
+            <a:chOff x="2057399" y="7577524"/>
+            <a:chExt cx="5033963" cy="298042"/>
+          </a:xfrm>
+        </p:grpSpPr>
+        <p:cxnSp>
+          <p:nvCxnSpPr>
+            <p:cNvPr id="80" name="Straight Connector 79">
+              <a:extLst>
+                <a:ext uri="{FF2B5EF4-FFF2-40B4-BE49-F238E27FC236}">
+                  <a16:creationId xmlns:a16="http://schemas.microsoft.com/office/drawing/2014/main" id="{AAE8165F-55A9-BE10-B97B-83B4DC2DD95C}"/>
+                </a:ext>
+              </a:extLst>
+            </p:cNvPr>
+            <p:cNvCxnSpPr>
+              <a:cxnSpLocks/>
+            </p:cNvCxnSpPr>
+            <p:nvPr/>
+          </p:nvCxnSpPr>
+          <p:spPr>
+            <a:xfrm>
+              <a:off x="2057400" y="7720399"/>
+              <a:ext cx="5029200" cy="0"/>
+            </a:xfrm>
+            <a:prstGeom prst="line">
+              <a:avLst/>
+            </a:prstGeom>
+            <a:ln w="76200">
+              <a:solidFill>
+                <a:schemeClr val="tx1"/>
+              </a:solidFill>
+            </a:ln>
+          </p:spPr>
+          <p:style>
+            <a:lnRef idx="2">
+              <a:schemeClr val="accent1"/>
+            </a:lnRef>
+            <a:fillRef idx="0">
+              <a:schemeClr val="accent1"/>
+            </a:fillRef>
+            <a:effectRef idx="1">
+              <a:schemeClr val="accent1"/>
+            </a:effectRef>
+            <a:fontRef idx="minor">
+              <a:schemeClr val="tx1"/>
+            </a:fontRef>
+          </p:style>
+        </p:cxnSp>
+        <p:cxnSp>
+          <p:nvCxnSpPr>
+            <p:cNvPr id="81" name="Straight Connector 80">
+              <a:extLst>
+                <a:ext uri="{FF2B5EF4-FFF2-40B4-BE49-F238E27FC236}">
+                  <a16:creationId xmlns:a16="http://schemas.microsoft.com/office/drawing/2014/main" id="{1E32DD78-5EC8-E108-5AE6-35D344757D95}"/>
+                </a:ext>
+              </a:extLst>
+            </p:cNvPr>
+            <p:cNvCxnSpPr>
+              <a:cxnSpLocks/>
+            </p:cNvCxnSpPr>
+            <p:nvPr/>
+          </p:nvCxnSpPr>
+          <p:spPr>
+            <a:xfrm flipV="1">
+              <a:off x="7091362" y="7577524"/>
+              <a:ext cx="0" cy="285750"/>
+            </a:xfrm>
+            <a:prstGeom prst="line">
+              <a:avLst/>
+            </a:prstGeom>
+            <a:ln w="76200">
+              <a:solidFill>
+                <a:schemeClr val="tx1"/>
+              </a:solidFill>
+            </a:ln>
+          </p:spPr>
+          <p:style>
+            <a:lnRef idx="2">
+              <a:schemeClr val="accent1"/>
+            </a:lnRef>
+            <a:fillRef idx="0">
+              <a:schemeClr val="accent1"/>
+            </a:fillRef>
+            <a:effectRef idx="1">
+              <a:schemeClr val="accent1"/>
+            </a:effectRef>
+            <a:fontRef idx="minor">
+              <a:schemeClr val="tx1"/>
+            </a:fontRef>
+          </p:style>
+        </p:cxnSp>
+        <p:cxnSp>
+          <p:nvCxnSpPr>
+            <p:cNvPr id="82" name="Straight Connector 81">
+              <a:extLst>
+                <a:ext uri="{FF2B5EF4-FFF2-40B4-BE49-F238E27FC236}">
+                  <a16:creationId xmlns:a16="http://schemas.microsoft.com/office/drawing/2014/main" id="{D42410A6-4D0D-A7AB-B904-D40B4EBE5904}"/>
+                </a:ext>
+              </a:extLst>
+            </p:cNvPr>
+            <p:cNvCxnSpPr>
+              <a:cxnSpLocks/>
+            </p:cNvCxnSpPr>
+            <p:nvPr/>
+          </p:nvCxnSpPr>
+          <p:spPr>
+            <a:xfrm flipV="1">
+              <a:off x="2057399" y="7589816"/>
+              <a:ext cx="0" cy="285750"/>
+            </a:xfrm>
+            <a:prstGeom prst="line">
+              <a:avLst/>
+            </a:prstGeom>
+            <a:ln w="76200">
+              <a:solidFill>
+                <a:schemeClr val="tx1"/>
+              </a:solidFill>
+            </a:ln>
+          </p:spPr>
+          <p:style>
+            <a:lnRef idx="2">
+              <a:schemeClr val="accent1"/>
+            </a:lnRef>
+            <a:fillRef idx="0">
+              <a:schemeClr val="accent1"/>
+            </a:fillRef>
+            <a:effectRef idx="1">
+              <a:schemeClr val="accent1"/>
+            </a:effectRef>
+            <a:fontRef idx="minor">
+              <a:schemeClr val="tx1"/>
+            </a:fontRef>
+          </p:style>
+        </p:cxnSp>
+      </p:grpSp>
+      <p:sp>
+        <p:nvSpPr>
+          <p:cNvPr id="87" name="TextBox 86">
+            <a:extLst>
+              <a:ext uri="{FF2B5EF4-FFF2-40B4-BE49-F238E27FC236}">
+                <a16:creationId xmlns:a16="http://schemas.microsoft.com/office/drawing/2014/main" id="{EE48B766-6FA4-B7C2-9C96-659A329FC914}"/>
+              </a:ext>
+            </a:extLst>
+          </p:cNvPr>
+          <p:cNvSpPr txBox="1"/>
+          <p:nvPr/>
+        </p:nvSpPr>
+        <p:spPr>
+          <a:xfrm>
+            <a:off x="3864566" y="8017133"/>
+            <a:ext cx="1374184" cy="461665"/>
+          </a:xfrm>
+          <a:prstGeom prst="rect">
+            <a:avLst/>
+          </a:prstGeom>
+          <a:noFill/>
+        </p:spPr>
+        <p:txBody>
+          <a:bodyPr wrap="square" lIns="0" tIns="0" rIns="0" bIns="0" rtlCol="0">
+            <a:spAutoFit/>
+          </a:bodyPr>
+          <a:lstStyle/>
+          <a:p>
+            <a:pPr algn="ctr"/>
+            <a:r>
+              <a:rPr lang="en-US" sz="3000" dirty="0" err="1"/>
+              <a:t>Y</a:t>
+            </a:r>
+            <a:r>
+              <a:rPr lang="en-US" sz="3000" baseline="-25000" dirty="0" err="1"/>
+              <a:t>p</a:t>
+            </a:r>
+            <a:endParaRPr lang="en-US" sz="3000" baseline="-25000" dirty="0"/>
+          </a:p>
+        </p:txBody>
+      </p:sp>
+      <p:sp>
+        <p:nvSpPr>
+          <p:cNvPr id="88" name="TextBox 87">
+            <a:extLst>
+              <a:ext uri="{FF2B5EF4-FFF2-40B4-BE49-F238E27FC236}">
+                <a16:creationId xmlns:a16="http://schemas.microsoft.com/office/drawing/2014/main" id="{55E63B65-83E1-7A77-0FAF-0AC68F00DBB1}"/>
+              </a:ext>
+            </a:extLst>
+          </p:cNvPr>
+          <p:cNvSpPr txBox="1"/>
+          <p:nvPr/>
+        </p:nvSpPr>
+        <p:spPr>
+          <a:xfrm>
+            <a:off x="12429394" y="8020441"/>
+            <a:ext cx="1374184" cy="461665"/>
+          </a:xfrm>
+          <a:prstGeom prst="rect">
+            <a:avLst/>
+          </a:prstGeom>
+          <a:noFill/>
+        </p:spPr>
+        <p:txBody>
+          <a:bodyPr wrap="square" lIns="0" tIns="0" rIns="0" bIns="0" rtlCol="0">
+            <a:spAutoFit/>
+          </a:bodyPr>
+          <a:lstStyle/>
+          <a:p>
+            <a:pPr algn="ctr"/>
+            <a:r>
+              <a:rPr lang="en-US" sz="3000" dirty="0" err="1"/>
+              <a:t>X</a:t>
+            </a:r>
+            <a:r>
+              <a:rPr lang="en-US" sz="3000" baseline="-25000" dirty="0" err="1"/>
+              <a:t>p</a:t>
+            </a:r>
+            <a:endParaRPr lang="en-US" sz="3000" baseline="-25000" dirty="0"/>
+          </a:p>
+        </p:txBody>
+      </p:sp>
+      <p:sp>
+        <p:nvSpPr>
+          <p:cNvPr id="89" name="TextBox 88">
+            <a:extLst>
+              <a:ext uri="{FF2B5EF4-FFF2-40B4-BE49-F238E27FC236}">
+                <a16:creationId xmlns:a16="http://schemas.microsoft.com/office/drawing/2014/main" id="{181F71C0-67D4-948A-01B0-A215728D7C8F}"/>
+              </a:ext>
+            </a:extLst>
+          </p:cNvPr>
+          <p:cNvSpPr txBox="1"/>
+          <p:nvPr/>
+        </p:nvSpPr>
+        <p:spPr>
+          <a:xfrm>
+            <a:off x="16940154" y="4172726"/>
+            <a:ext cx="1374184" cy="461665"/>
+          </a:xfrm>
+          <a:prstGeom prst="rect">
+            <a:avLst/>
+          </a:prstGeom>
+          <a:noFill/>
+        </p:spPr>
+        <p:txBody>
+          <a:bodyPr wrap="square" lIns="0" tIns="0" rIns="0" bIns="0" rtlCol="0">
+            <a:spAutoFit/>
+          </a:bodyPr>
+          <a:lstStyle/>
+          <a:p>
+            <a:pPr algn="ctr"/>
+            <a:r>
+              <a:rPr lang="en-US" sz="3000" dirty="0" err="1"/>
+              <a:t>Z</a:t>
+            </a:r>
+            <a:r>
+              <a:rPr lang="en-US" sz="3000" baseline="-25000" dirty="0" err="1"/>
+              <a:t>p</a:t>
+            </a:r>
+            <a:endParaRPr lang="en-US" sz="3000" baseline="-25000" dirty="0"/>
+          </a:p>
+        </p:txBody>
+      </p:sp>
+      <p:sp>
+        <p:nvSpPr>
+          <p:cNvPr id="91" name="Arc 90">
+            <a:extLst>
+              <a:ext uri="{FF2B5EF4-FFF2-40B4-BE49-F238E27FC236}">
+                <a16:creationId xmlns:a16="http://schemas.microsoft.com/office/drawing/2014/main" id="{23E27442-1B6B-1F35-DD08-3A1B286E9EAA}"/>
+              </a:ext>
+            </a:extLst>
+          </p:cNvPr>
+          <p:cNvSpPr/>
+          <p:nvPr/>
+        </p:nvSpPr>
+        <p:spPr>
+          <a:xfrm>
+            <a:off x="13570623" y="2737626"/>
+            <a:ext cx="1371600" cy="1371600"/>
+          </a:xfrm>
+          <a:prstGeom prst="arc">
+            <a:avLst>
+              <a:gd name="adj1" fmla="val 17052951"/>
+              <a:gd name="adj2" fmla="val 0"/>
+            </a:avLst>
+          </a:prstGeom>
+          <a:ln w="38100">
+            <a:prstDash val="dash"/>
+          </a:ln>
+        </p:spPr>
+        <p:style>
+          <a:lnRef idx="2">
+            <a:schemeClr val="accent1"/>
+          </a:lnRef>
+          <a:fillRef idx="0">
+            <a:schemeClr val="accent1"/>
+          </a:fillRef>
+          <a:effectRef idx="1">
+            <a:schemeClr val="accent1"/>
+          </a:effectRef>
+          <a:fontRef idx="minor">
+            <a:schemeClr val="tx1"/>
+          </a:fontRef>
+        </p:style>
+        <p:txBody>
+          <a:bodyPr rtlCol="0" anchor="ctr"/>
+          <a:lstStyle/>
+          <a:p>
+            <a:pPr algn="ctr"/>
+            <a:endParaRPr lang="en-US" sz="3000"/>
+          </a:p>
+        </p:txBody>
+      </p:sp>
+      <p:sp>
+        <p:nvSpPr>
+          <p:cNvPr id="93" name="Arc 92">
+            <a:extLst>
+              <a:ext uri="{FF2B5EF4-FFF2-40B4-BE49-F238E27FC236}">
+                <a16:creationId xmlns:a16="http://schemas.microsoft.com/office/drawing/2014/main" id="{4B1F5588-CA08-8ED9-7EE9-A5F16A69DD3F}"/>
+              </a:ext>
+            </a:extLst>
+          </p:cNvPr>
+          <p:cNvSpPr/>
+          <p:nvPr/>
+        </p:nvSpPr>
+        <p:spPr>
+          <a:xfrm>
+            <a:off x="13424102" y="1012616"/>
+            <a:ext cx="1822247" cy="1822247"/>
+          </a:xfrm>
+          <a:prstGeom prst="arc">
+            <a:avLst>
+              <a:gd name="adj1" fmla="val 6175692"/>
+              <a:gd name="adj2" fmla="val 16001104"/>
+            </a:avLst>
+          </a:prstGeom>
+          <a:ln w="38100">
+            <a:prstDash val="dash"/>
+          </a:ln>
+        </p:spPr>
+        <p:style>
+          <a:lnRef idx="2">
+            <a:schemeClr val="accent1"/>
+          </a:lnRef>
+          <a:fillRef idx="0">
+            <a:schemeClr val="accent1"/>
+          </a:fillRef>
+          <a:effectRef idx="1">
+            <a:schemeClr val="accent1"/>
+          </a:effectRef>
+          <a:fontRef idx="minor">
+            <a:schemeClr val="tx1"/>
+          </a:fontRef>
+        </p:style>
+        <p:txBody>
+          <a:bodyPr rtlCol="0" anchor="ctr"/>
+          <a:lstStyle/>
+          <a:p>
+            <a:pPr algn="ctr"/>
+            <a:endParaRPr lang="en-US" sz="3000"/>
+          </a:p>
+        </p:txBody>
+      </p:sp>
+      <p:sp>
+        <p:nvSpPr>
+          <p:cNvPr id="97" name="TextBox 96">
+            <a:extLst>
+              <a:ext uri="{FF2B5EF4-FFF2-40B4-BE49-F238E27FC236}">
+                <a16:creationId xmlns:a16="http://schemas.microsoft.com/office/drawing/2014/main" id="{96C1F5BE-A7D3-A7DC-BAD2-92D986A35E00}"/>
+              </a:ext>
+            </a:extLst>
+          </p:cNvPr>
+          <p:cNvSpPr txBox="1"/>
+          <p:nvPr/>
+        </p:nvSpPr>
+        <p:spPr>
+          <a:xfrm>
+            <a:off x="16123915" y="2668684"/>
+            <a:ext cx="596901" cy="461665"/>
+          </a:xfrm>
+          <a:prstGeom prst="rect">
+            <a:avLst/>
+          </a:prstGeom>
+          <a:noFill/>
+        </p:spPr>
+        <p:txBody>
+          <a:bodyPr wrap="square" lIns="0" tIns="0" rIns="0" bIns="0" rtlCol="0">
+            <a:spAutoFit/>
+          </a:bodyPr>
+          <a:lstStyle/>
+          <a:p>
+            <a:pPr algn="ctr"/>
+            <a:r>
+              <a:rPr lang="en-US" sz="3000" dirty="0"/>
+              <a:t>C’</a:t>
+            </a:r>
+          </a:p>
+        </p:txBody>
+      </p:sp>
+      <p:grpSp>
+        <p:nvGrpSpPr>
+          <p:cNvPr id="102" name="Group 101">
+            <a:extLst>
+              <a:ext uri="{FF2B5EF4-FFF2-40B4-BE49-F238E27FC236}">
+                <a16:creationId xmlns:a16="http://schemas.microsoft.com/office/drawing/2014/main" id="{2129D31B-107E-6C9B-7081-801E88C33D44}"/>
+              </a:ext>
+            </a:extLst>
+          </p:cNvPr>
+          <p:cNvGrpSpPr/>
+          <p:nvPr/>
+        </p:nvGrpSpPr>
+        <p:grpSpPr>
+          <a:xfrm rot="16200000">
+            <a:off x="4596143" y="3965788"/>
+            <a:ext cx="7186592" cy="298042"/>
+            <a:chOff x="2057399" y="7577524"/>
+            <a:chExt cx="5033963" cy="298042"/>
+          </a:xfrm>
+        </p:grpSpPr>
+        <p:cxnSp>
+          <p:nvCxnSpPr>
+            <p:cNvPr id="103" name="Straight Connector 102">
+              <a:extLst>
+                <a:ext uri="{FF2B5EF4-FFF2-40B4-BE49-F238E27FC236}">
+                  <a16:creationId xmlns:a16="http://schemas.microsoft.com/office/drawing/2014/main" id="{00E4C367-C389-F94E-02D1-E655F8604657}"/>
+                </a:ext>
+              </a:extLst>
+            </p:cNvPr>
+            <p:cNvCxnSpPr>
+              <a:cxnSpLocks/>
+            </p:cNvCxnSpPr>
+            <p:nvPr/>
+          </p:nvCxnSpPr>
+          <p:spPr>
+            <a:xfrm>
+              <a:off x="2057400" y="7720399"/>
+              <a:ext cx="5029200" cy="0"/>
+            </a:xfrm>
+            <a:prstGeom prst="line">
+              <a:avLst/>
+            </a:prstGeom>
+            <a:ln w="76200">
+              <a:solidFill>
+                <a:schemeClr val="tx1"/>
+              </a:solidFill>
+            </a:ln>
+          </p:spPr>
+          <p:style>
+            <a:lnRef idx="2">
+              <a:schemeClr val="accent1"/>
+            </a:lnRef>
+            <a:fillRef idx="0">
+              <a:schemeClr val="accent1"/>
+            </a:fillRef>
+            <a:effectRef idx="1">
+              <a:schemeClr val="accent1"/>
+            </a:effectRef>
+            <a:fontRef idx="minor">
+              <a:schemeClr val="tx1"/>
+            </a:fontRef>
+          </p:style>
+        </p:cxnSp>
+        <p:cxnSp>
+          <p:nvCxnSpPr>
+            <p:cNvPr id="104" name="Straight Connector 103">
+              <a:extLst>
+                <a:ext uri="{FF2B5EF4-FFF2-40B4-BE49-F238E27FC236}">
+                  <a16:creationId xmlns:a16="http://schemas.microsoft.com/office/drawing/2014/main" id="{F0A25FF3-3ABA-B5C5-EB29-595FDC4C0742}"/>
+                </a:ext>
+              </a:extLst>
+            </p:cNvPr>
+            <p:cNvCxnSpPr>
+              <a:cxnSpLocks/>
+            </p:cNvCxnSpPr>
+            <p:nvPr/>
+          </p:nvCxnSpPr>
+          <p:spPr>
+            <a:xfrm flipV="1">
+              <a:off x="7091362" y="7577524"/>
+              <a:ext cx="0" cy="285750"/>
+            </a:xfrm>
+            <a:prstGeom prst="line">
+              <a:avLst/>
+            </a:prstGeom>
+            <a:ln w="76200">
+              <a:solidFill>
+                <a:schemeClr val="tx1"/>
+              </a:solidFill>
+            </a:ln>
+          </p:spPr>
+          <p:style>
+            <a:lnRef idx="2">
+              <a:schemeClr val="accent1"/>
+            </a:lnRef>
+            <a:fillRef idx="0">
+              <a:schemeClr val="accent1"/>
+            </a:fillRef>
+            <a:effectRef idx="1">
+              <a:schemeClr val="accent1"/>
+            </a:effectRef>
+            <a:fontRef idx="minor">
+              <a:schemeClr val="tx1"/>
+            </a:fontRef>
+          </p:style>
+        </p:cxnSp>
+        <p:cxnSp>
+          <p:nvCxnSpPr>
+            <p:cNvPr id="105" name="Straight Connector 104">
+              <a:extLst>
+                <a:ext uri="{FF2B5EF4-FFF2-40B4-BE49-F238E27FC236}">
+                  <a16:creationId xmlns:a16="http://schemas.microsoft.com/office/drawing/2014/main" id="{093AF558-D017-3EA2-C9DD-C1EC9DB1E978}"/>
+                </a:ext>
+              </a:extLst>
+            </p:cNvPr>
+            <p:cNvCxnSpPr>
+              <a:cxnSpLocks/>
+            </p:cNvCxnSpPr>
+            <p:nvPr/>
+          </p:nvCxnSpPr>
+          <p:spPr>
+            <a:xfrm flipV="1">
+              <a:off x="2057399" y="7589816"/>
+              <a:ext cx="0" cy="285750"/>
+            </a:xfrm>
+            <a:prstGeom prst="line">
+              <a:avLst/>
+            </a:prstGeom>
+            <a:ln w="76200">
+              <a:solidFill>
+                <a:schemeClr val="tx1"/>
+              </a:solidFill>
+            </a:ln>
+          </p:spPr>
+          <p:style>
+            <a:lnRef idx="2">
+              <a:schemeClr val="accent1"/>
+            </a:lnRef>
+            <a:fillRef idx="0">
+              <a:schemeClr val="accent1"/>
+            </a:fillRef>
+            <a:effectRef idx="1">
+              <a:schemeClr val="accent1"/>
+            </a:effectRef>
+            <a:fontRef idx="minor">
+              <a:schemeClr val="tx1"/>
+            </a:fontRef>
+          </p:style>
+        </p:cxnSp>
+      </p:grpSp>
+      <p:sp>
+        <p:nvSpPr>
+          <p:cNvPr id="106" name="TextBox 105">
+            <a:extLst>
+              <a:ext uri="{FF2B5EF4-FFF2-40B4-BE49-F238E27FC236}">
+                <a16:creationId xmlns:a16="http://schemas.microsoft.com/office/drawing/2014/main" id="{821C2061-B055-D987-D748-0F44723BF21F}"/>
+              </a:ext>
+            </a:extLst>
+          </p:cNvPr>
+          <p:cNvSpPr txBox="1"/>
+          <p:nvPr/>
+        </p:nvSpPr>
+        <p:spPr>
+          <a:xfrm>
+            <a:off x="8020130" y="4070350"/>
+            <a:ext cx="1374184" cy="461665"/>
+          </a:xfrm>
+          <a:prstGeom prst="rect">
+            <a:avLst/>
+          </a:prstGeom>
+          <a:noFill/>
+        </p:spPr>
+        <p:txBody>
+          <a:bodyPr wrap="square" lIns="0" tIns="0" rIns="0" bIns="0" rtlCol="0">
+            <a:spAutoFit/>
+          </a:bodyPr>
+          <a:lstStyle/>
+          <a:p>
+            <a:pPr algn="ctr"/>
+            <a:r>
+              <a:rPr lang="en-US" sz="3000" dirty="0" err="1"/>
+              <a:t>Zp</a:t>
+            </a:r>
+            <a:endParaRPr lang="en-US" sz="3000" dirty="0"/>
+          </a:p>
+        </p:txBody>
+      </p:sp>
+      <p:sp>
+        <p:nvSpPr>
+          <p:cNvPr id="136" name="Oval 135">
+            <a:extLst>
+              <a:ext uri="{FF2B5EF4-FFF2-40B4-BE49-F238E27FC236}">
+                <a16:creationId xmlns:a16="http://schemas.microsoft.com/office/drawing/2014/main" id="{F27485F2-F20F-2A56-612F-C180786B4D17}"/>
+              </a:ext>
+            </a:extLst>
+          </p:cNvPr>
+          <p:cNvSpPr/>
+          <p:nvPr/>
+        </p:nvSpPr>
+        <p:spPr>
+          <a:xfrm>
+            <a:off x="2038350" y="12024499"/>
+            <a:ext cx="342900" cy="342900"/>
+          </a:xfrm>
+          <a:prstGeom prst="ellipse">
+            <a:avLst/>
+          </a:prstGeom>
+          <a:solidFill>
+            <a:schemeClr val="tx1"/>
+          </a:solidFill>
+          <a:ln>
+            <a:noFill/>
+          </a:ln>
+        </p:spPr>
+        <p:style>
+          <a:lnRef idx="2">
+            <a:schemeClr val="accent1">
+              <a:shade val="15000"/>
+            </a:schemeClr>
+          </a:lnRef>
+          <a:fillRef idx="1">
+            <a:schemeClr val="accent1"/>
+          </a:fillRef>
+          <a:effectRef idx="0">
+            <a:schemeClr val="accent1"/>
+          </a:effectRef>
+          <a:fontRef idx="minor">
+            <a:schemeClr val="lt1"/>
+          </a:fontRef>
+        </p:style>
+        <p:txBody>
+          <a:bodyPr rtlCol="0" anchor="ctr"/>
+          <a:lstStyle/>
+          <a:p>
+            <a:pPr algn="ctr"/>
+            <a:endParaRPr lang="en-US" sz="3000"/>
+          </a:p>
+        </p:txBody>
+      </p:sp>
+      <p:cxnSp>
+        <p:nvCxnSpPr>
+          <p:cNvPr id="137" name="Straight Connector 136">
+            <a:extLst>
+              <a:ext uri="{FF2B5EF4-FFF2-40B4-BE49-F238E27FC236}">
+                <a16:creationId xmlns:a16="http://schemas.microsoft.com/office/drawing/2014/main" id="{580CDEA6-8BD3-A9ED-B282-74A9C60E1283}"/>
+              </a:ext>
+            </a:extLst>
+          </p:cNvPr>
+          <p:cNvCxnSpPr>
+            <a:cxnSpLocks/>
+          </p:cNvCxnSpPr>
+          <p:nvPr/>
+        </p:nvCxnSpPr>
+        <p:spPr>
+          <a:xfrm flipH="1">
+            <a:off x="2235199" y="12166288"/>
+            <a:ext cx="1471966" cy="0"/>
+          </a:xfrm>
+          <a:prstGeom prst="line">
+            <a:avLst/>
+          </a:prstGeom>
+          <a:ln w="76200">
+            <a:solidFill>
+              <a:schemeClr val="accent2">
+                <a:lumMod val="75000"/>
+              </a:schemeClr>
+            </a:solidFill>
+          </a:ln>
+        </p:spPr>
+        <p:style>
+          <a:lnRef idx="2">
+            <a:schemeClr val="accent1"/>
+          </a:lnRef>
+          <a:fillRef idx="0">
+            <a:schemeClr val="accent1"/>
+          </a:fillRef>
+          <a:effectRef idx="1">
+            <a:schemeClr val="accent1"/>
+          </a:effectRef>
+          <a:fontRef idx="minor">
+            <a:schemeClr val="tx1"/>
+          </a:fontRef>
+        </p:style>
+      </p:cxnSp>
+      <p:cxnSp>
+        <p:nvCxnSpPr>
+          <p:cNvPr id="139" name="Straight Connector 138">
+            <a:extLst>
+              <a:ext uri="{FF2B5EF4-FFF2-40B4-BE49-F238E27FC236}">
+                <a16:creationId xmlns:a16="http://schemas.microsoft.com/office/drawing/2014/main" id="{B8289244-9AA8-705A-661F-EEA42D06F026}"/>
+              </a:ext>
+            </a:extLst>
+          </p:cNvPr>
+          <p:cNvCxnSpPr>
+            <a:cxnSpLocks/>
+          </p:cNvCxnSpPr>
+          <p:nvPr/>
+        </p:nvCxnSpPr>
+        <p:spPr>
+          <a:xfrm flipH="1" flipV="1">
+            <a:off x="3663950" y="12068826"/>
+            <a:ext cx="1746250" cy="1559915"/>
+          </a:xfrm>
+          <a:prstGeom prst="line">
+            <a:avLst/>
+          </a:prstGeom>
+          <a:ln w="76200">
+            <a:solidFill>
+              <a:schemeClr val="accent2">
+                <a:lumMod val="75000"/>
+              </a:schemeClr>
+            </a:solidFill>
+          </a:ln>
+        </p:spPr>
+        <p:style>
+          <a:lnRef idx="2">
+            <a:schemeClr val="accent1"/>
+          </a:lnRef>
+          <a:fillRef idx="0">
+            <a:schemeClr val="accent1"/>
+          </a:fillRef>
+          <a:effectRef idx="1">
+            <a:schemeClr val="accent1"/>
+          </a:effectRef>
+          <a:fontRef idx="minor">
+            <a:schemeClr val="tx1"/>
+          </a:fontRef>
+        </p:style>
+      </p:cxnSp>
+      <p:sp>
+        <p:nvSpPr>
+          <p:cNvPr id="143" name="Oval 142">
+            <a:extLst>
+              <a:ext uri="{FF2B5EF4-FFF2-40B4-BE49-F238E27FC236}">
+                <a16:creationId xmlns:a16="http://schemas.microsoft.com/office/drawing/2014/main" id="{22A19D5B-23C1-258E-E4A2-49B95BEF81F3}"/>
+              </a:ext>
+            </a:extLst>
+          </p:cNvPr>
+          <p:cNvSpPr/>
+          <p:nvPr/>
+        </p:nvSpPr>
+        <p:spPr>
+          <a:xfrm>
+            <a:off x="3539934" y="12039165"/>
+            <a:ext cx="342900" cy="342900"/>
+          </a:xfrm>
+          <a:prstGeom prst="ellipse">
+            <a:avLst/>
+          </a:prstGeom>
+          <a:solidFill>
+            <a:schemeClr val="accent5">
+              <a:lumMod val="40000"/>
+              <a:lumOff val="60000"/>
+            </a:schemeClr>
+          </a:solidFill>
+          <a:ln>
+            <a:noFill/>
+          </a:ln>
+        </p:spPr>
+        <p:style>
+          <a:lnRef idx="2">
+            <a:schemeClr val="accent1">
+              <a:shade val="15000"/>
+            </a:schemeClr>
+          </a:lnRef>
+          <a:fillRef idx="1">
+            <a:schemeClr val="accent1"/>
+          </a:fillRef>
+          <a:effectRef idx="0">
+            <a:schemeClr val="accent1"/>
+          </a:effectRef>
+          <a:fontRef idx="minor">
+            <a:schemeClr val="lt1"/>
+          </a:fontRef>
+        </p:style>
+        <p:txBody>
+          <a:bodyPr rtlCol="0" anchor="ctr"/>
+          <a:lstStyle/>
+          <a:p>
+            <a:pPr algn="ctr"/>
+            <a:endParaRPr lang="en-US" sz="3000"/>
+          </a:p>
+        </p:txBody>
+      </p:sp>
+      <p:sp>
+        <p:nvSpPr>
+          <p:cNvPr id="144" name="Oval 143">
+            <a:extLst>
+              <a:ext uri="{FF2B5EF4-FFF2-40B4-BE49-F238E27FC236}">
+                <a16:creationId xmlns:a16="http://schemas.microsoft.com/office/drawing/2014/main" id="{B0CE8856-FADC-FAF5-EEB1-92E474C236AC}"/>
+              </a:ext>
+            </a:extLst>
+          </p:cNvPr>
+          <p:cNvSpPr/>
+          <p:nvPr/>
+        </p:nvSpPr>
+        <p:spPr>
+          <a:xfrm>
+            <a:off x="5256009" y="13457291"/>
+            <a:ext cx="342900" cy="342900"/>
+          </a:xfrm>
+          <a:prstGeom prst="ellipse">
+            <a:avLst/>
+          </a:prstGeom>
+          <a:solidFill>
+            <a:schemeClr val="accent6">
+              <a:lumMod val="60000"/>
+              <a:lumOff val="40000"/>
+            </a:schemeClr>
+          </a:solidFill>
+          <a:ln>
+            <a:noFill/>
+          </a:ln>
+        </p:spPr>
+        <p:style>
+          <a:lnRef idx="2">
+            <a:schemeClr val="accent1">
+              <a:shade val="15000"/>
+            </a:schemeClr>
+          </a:lnRef>
+          <a:fillRef idx="1">
+            <a:schemeClr val="accent1"/>
+          </a:fillRef>
+          <a:effectRef idx="0">
+            <a:schemeClr val="accent1"/>
+          </a:effectRef>
+          <a:fontRef idx="minor">
+            <a:schemeClr val="lt1"/>
+          </a:fontRef>
+        </p:style>
+        <p:txBody>
+          <a:bodyPr rtlCol="0" anchor="ctr"/>
+          <a:lstStyle/>
+          <a:p>
+            <a:pPr algn="ctr"/>
+            <a:endParaRPr lang="en-US" sz="3000"/>
+          </a:p>
+        </p:txBody>
+      </p:sp>
+      <p:cxnSp>
+        <p:nvCxnSpPr>
+          <p:cNvPr id="163" name="Straight Connector 162">
+            <a:extLst>
+              <a:ext uri="{FF2B5EF4-FFF2-40B4-BE49-F238E27FC236}">
+                <a16:creationId xmlns:a16="http://schemas.microsoft.com/office/drawing/2014/main" id="{DC7EA5AD-31EF-C55C-68B5-E49794CE94CE}"/>
+              </a:ext>
+            </a:extLst>
+          </p:cNvPr>
+          <p:cNvCxnSpPr>
+            <a:cxnSpLocks/>
+          </p:cNvCxnSpPr>
+          <p:nvPr/>
+        </p:nvCxnSpPr>
+        <p:spPr>
+          <a:xfrm flipV="1">
+            <a:off x="5390003" y="12696825"/>
+            <a:ext cx="1706122" cy="926659"/>
+          </a:xfrm>
+          <a:prstGeom prst="line">
+            <a:avLst/>
+          </a:prstGeom>
+          <a:ln w="76200">
+            <a:solidFill>
+              <a:schemeClr val="accent2">
+                <a:lumMod val="75000"/>
+              </a:schemeClr>
+            </a:solidFill>
+          </a:ln>
+        </p:spPr>
+        <p:style>
+          <a:lnRef idx="2">
+            <a:schemeClr val="accent1"/>
+          </a:lnRef>
+          <a:fillRef idx="0">
+            <a:schemeClr val="accent1"/>
+          </a:fillRef>
+          <a:effectRef idx="1">
+            <a:schemeClr val="accent1"/>
+          </a:effectRef>
+          <a:fontRef idx="minor">
+            <a:schemeClr val="tx1"/>
+          </a:fontRef>
+        </p:style>
+      </p:cxnSp>
+      <p:sp>
+        <p:nvSpPr>
+          <p:cNvPr id="164" name="Oval 163">
+            <a:extLst>
+              <a:ext uri="{FF2B5EF4-FFF2-40B4-BE49-F238E27FC236}">
+                <a16:creationId xmlns:a16="http://schemas.microsoft.com/office/drawing/2014/main" id="{FE17B7DD-FE26-6337-C620-C205DF798009}"/>
+              </a:ext>
+            </a:extLst>
+          </p:cNvPr>
+          <p:cNvSpPr/>
+          <p:nvPr/>
+        </p:nvSpPr>
+        <p:spPr>
+          <a:xfrm>
+            <a:off x="6894953" y="12505883"/>
+            <a:ext cx="342900" cy="342900"/>
+          </a:xfrm>
+          <a:prstGeom prst="ellipse">
+            <a:avLst/>
+          </a:prstGeom>
+          <a:solidFill>
+            <a:srgbClr val="FF0000"/>
+          </a:solidFill>
+          <a:ln>
+            <a:noFill/>
+          </a:ln>
+        </p:spPr>
+        <p:style>
+          <a:lnRef idx="2">
+            <a:schemeClr val="accent1">
+              <a:shade val="15000"/>
+            </a:schemeClr>
+          </a:lnRef>
+          <a:fillRef idx="1">
+            <a:schemeClr val="accent1"/>
+          </a:fillRef>
+          <a:effectRef idx="0">
+            <a:schemeClr val="accent1"/>
+          </a:effectRef>
+          <a:fontRef idx="minor">
+            <a:schemeClr val="lt1"/>
+          </a:fontRef>
+        </p:style>
+        <p:txBody>
+          <a:bodyPr rtlCol="0" anchor="ctr"/>
+          <a:lstStyle/>
+          <a:p>
+            <a:pPr algn="ctr"/>
+            <a:endParaRPr lang="en-US" sz="3000"/>
+          </a:p>
+        </p:txBody>
+      </p:sp>
+      <p:grpSp>
+        <p:nvGrpSpPr>
+          <p:cNvPr id="165" name="Group 164">
+            <a:extLst>
+              <a:ext uri="{FF2B5EF4-FFF2-40B4-BE49-F238E27FC236}">
+                <a16:creationId xmlns:a16="http://schemas.microsoft.com/office/drawing/2014/main" id="{5128835B-4D0B-C48A-EC53-E59906CD764F}"/>
+              </a:ext>
+            </a:extLst>
+          </p:cNvPr>
+          <p:cNvGrpSpPr/>
+          <p:nvPr/>
+        </p:nvGrpSpPr>
+        <p:grpSpPr>
+          <a:xfrm>
+            <a:off x="2095500" y="14431149"/>
+            <a:ext cx="5033963" cy="298042"/>
+            <a:chOff x="2057399" y="7577524"/>
+            <a:chExt cx="5033963" cy="298042"/>
+          </a:xfrm>
+        </p:grpSpPr>
+        <p:cxnSp>
+          <p:nvCxnSpPr>
+            <p:cNvPr id="166" name="Straight Connector 165">
+              <a:extLst>
+                <a:ext uri="{FF2B5EF4-FFF2-40B4-BE49-F238E27FC236}">
+                  <a16:creationId xmlns:a16="http://schemas.microsoft.com/office/drawing/2014/main" id="{2052BA8B-0CA3-8A92-AB30-D8D2FA6B917C}"/>
+                </a:ext>
+              </a:extLst>
+            </p:cNvPr>
+            <p:cNvCxnSpPr>
+              <a:cxnSpLocks/>
+            </p:cNvCxnSpPr>
+            <p:nvPr/>
+          </p:nvCxnSpPr>
+          <p:spPr>
+            <a:xfrm>
+              <a:off x="2057400" y="7720399"/>
+              <a:ext cx="5029200" cy="0"/>
+            </a:xfrm>
+            <a:prstGeom prst="line">
+              <a:avLst/>
+            </a:prstGeom>
+            <a:ln w="76200">
+              <a:solidFill>
+                <a:schemeClr val="tx1"/>
+              </a:solidFill>
+            </a:ln>
+          </p:spPr>
+          <p:style>
+            <a:lnRef idx="2">
+              <a:schemeClr val="accent1"/>
+            </a:lnRef>
+            <a:fillRef idx="0">
+              <a:schemeClr val="accent1"/>
+            </a:fillRef>
+            <a:effectRef idx="1">
+              <a:schemeClr val="accent1"/>
+            </a:effectRef>
+            <a:fontRef idx="minor">
+              <a:schemeClr val="tx1"/>
+            </a:fontRef>
+          </p:style>
+        </p:cxnSp>
+        <p:cxnSp>
+          <p:nvCxnSpPr>
+            <p:cNvPr id="167" name="Straight Connector 166">
+              <a:extLst>
+                <a:ext uri="{FF2B5EF4-FFF2-40B4-BE49-F238E27FC236}">
+                  <a16:creationId xmlns:a16="http://schemas.microsoft.com/office/drawing/2014/main" id="{E86FFB0C-84BD-A317-ACA2-D15BD54F62E0}"/>
+                </a:ext>
+              </a:extLst>
+            </p:cNvPr>
+            <p:cNvCxnSpPr>
+              <a:cxnSpLocks/>
+            </p:cNvCxnSpPr>
+            <p:nvPr/>
+          </p:nvCxnSpPr>
+          <p:spPr>
+            <a:xfrm flipV="1">
+              <a:off x="7091362" y="7577524"/>
+              <a:ext cx="0" cy="285750"/>
+            </a:xfrm>
+            <a:prstGeom prst="line">
+              <a:avLst/>
+            </a:prstGeom>
+            <a:ln w="76200">
+              <a:solidFill>
+                <a:schemeClr val="tx1"/>
+              </a:solidFill>
+            </a:ln>
+          </p:spPr>
+          <p:style>
+            <a:lnRef idx="2">
+              <a:schemeClr val="accent1"/>
+            </a:lnRef>
+            <a:fillRef idx="0">
+              <a:schemeClr val="accent1"/>
+            </a:fillRef>
+            <a:effectRef idx="1">
+              <a:schemeClr val="accent1"/>
+            </a:effectRef>
+            <a:fontRef idx="minor">
+              <a:schemeClr val="tx1"/>
+            </a:fontRef>
+          </p:style>
+        </p:cxnSp>
+        <p:cxnSp>
+          <p:nvCxnSpPr>
+            <p:cNvPr id="168" name="Straight Connector 167">
+              <a:extLst>
+                <a:ext uri="{FF2B5EF4-FFF2-40B4-BE49-F238E27FC236}">
+                  <a16:creationId xmlns:a16="http://schemas.microsoft.com/office/drawing/2014/main" id="{240E1208-6C4A-328D-FE0A-523B627932D7}"/>
+                </a:ext>
+              </a:extLst>
+            </p:cNvPr>
+            <p:cNvCxnSpPr>
+              <a:cxnSpLocks/>
+            </p:cNvCxnSpPr>
+            <p:nvPr/>
+          </p:nvCxnSpPr>
+          <p:spPr>
+            <a:xfrm flipV="1">
+              <a:off x="2057399" y="7589816"/>
+              <a:ext cx="0" cy="285750"/>
+            </a:xfrm>
+            <a:prstGeom prst="line">
+              <a:avLst/>
+            </a:prstGeom>
+            <a:ln w="76200">
+              <a:solidFill>
+                <a:schemeClr val="tx1"/>
+              </a:solidFill>
+            </a:ln>
+          </p:spPr>
+          <p:style>
+            <a:lnRef idx="2">
+              <a:schemeClr val="accent1"/>
+            </a:lnRef>
+            <a:fillRef idx="0">
+              <a:schemeClr val="accent1"/>
+            </a:fillRef>
+            <a:effectRef idx="1">
+              <a:schemeClr val="accent1"/>
+            </a:effectRef>
+            <a:fontRef idx="minor">
+              <a:schemeClr val="tx1"/>
+            </a:fontRef>
+          </p:style>
+        </p:cxnSp>
+      </p:grpSp>
+      <p:grpSp>
+        <p:nvGrpSpPr>
+          <p:cNvPr id="169" name="Group 168">
+            <a:extLst>
+              <a:ext uri="{FF2B5EF4-FFF2-40B4-BE49-F238E27FC236}">
+                <a16:creationId xmlns:a16="http://schemas.microsoft.com/office/drawing/2014/main" id="{6DFCEA91-84AB-1283-38D8-56127792B58C}"/>
+              </a:ext>
+            </a:extLst>
+          </p:cNvPr>
+          <p:cNvGrpSpPr/>
+          <p:nvPr/>
+        </p:nvGrpSpPr>
+        <p:grpSpPr>
+          <a:xfrm rot="16200000" flipH="1">
+            <a:off x="7787441" y="12282535"/>
+            <a:ext cx="530537" cy="298042"/>
+            <a:chOff x="2057399" y="7577524"/>
+            <a:chExt cx="5033963" cy="298042"/>
+          </a:xfrm>
+        </p:grpSpPr>
+        <p:cxnSp>
+          <p:nvCxnSpPr>
+            <p:cNvPr id="170" name="Straight Connector 169">
+              <a:extLst>
+                <a:ext uri="{FF2B5EF4-FFF2-40B4-BE49-F238E27FC236}">
+                  <a16:creationId xmlns:a16="http://schemas.microsoft.com/office/drawing/2014/main" id="{343D0A09-7200-40E7-6915-538279312BCA}"/>
+                </a:ext>
+              </a:extLst>
+            </p:cNvPr>
+            <p:cNvCxnSpPr>
+              <a:cxnSpLocks/>
+            </p:cNvCxnSpPr>
+            <p:nvPr/>
+          </p:nvCxnSpPr>
+          <p:spPr>
+            <a:xfrm>
+              <a:off x="2057400" y="7720399"/>
+              <a:ext cx="5029200" cy="0"/>
+            </a:xfrm>
+            <a:prstGeom prst="line">
+              <a:avLst/>
+            </a:prstGeom>
+            <a:ln w="76200">
+              <a:solidFill>
+                <a:schemeClr val="tx1"/>
+              </a:solidFill>
+            </a:ln>
+          </p:spPr>
+          <p:style>
+            <a:lnRef idx="2">
+              <a:schemeClr val="accent1"/>
+            </a:lnRef>
+            <a:fillRef idx="0">
+              <a:schemeClr val="accent1"/>
+            </a:fillRef>
+            <a:effectRef idx="1">
+              <a:schemeClr val="accent1"/>
+            </a:effectRef>
+            <a:fontRef idx="minor">
+              <a:schemeClr val="tx1"/>
+            </a:fontRef>
+          </p:style>
+        </p:cxnSp>
+        <p:cxnSp>
+          <p:nvCxnSpPr>
+            <p:cNvPr id="171" name="Straight Connector 170">
+              <a:extLst>
+                <a:ext uri="{FF2B5EF4-FFF2-40B4-BE49-F238E27FC236}">
+                  <a16:creationId xmlns:a16="http://schemas.microsoft.com/office/drawing/2014/main" id="{693BE922-FD33-8345-BE8B-1FD048A247B7}"/>
+                </a:ext>
+              </a:extLst>
+            </p:cNvPr>
+            <p:cNvCxnSpPr>
+              <a:cxnSpLocks/>
+            </p:cNvCxnSpPr>
+            <p:nvPr/>
+          </p:nvCxnSpPr>
+          <p:spPr>
+            <a:xfrm flipV="1">
+              <a:off x="7091362" y="7577524"/>
+              <a:ext cx="0" cy="285750"/>
+            </a:xfrm>
+            <a:prstGeom prst="line">
+              <a:avLst/>
+            </a:prstGeom>
+            <a:ln w="76200">
+              <a:solidFill>
+                <a:schemeClr val="tx1"/>
+              </a:solidFill>
+            </a:ln>
+          </p:spPr>
+          <p:style>
+            <a:lnRef idx="2">
+              <a:schemeClr val="accent1"/>
+            </a:lnRef>
+            <a:fillRef idx="0">
+              <a:schemeClr val="accent1"/>
+            </a:fillRef>
+            <a:effectRef idx="1">
+              <a:schemeClr val="accent1"/>
+            </a:effectRef>
+            <a:fontRef idx="minor">
+              <a:schemeClr val="tx1"/>
+            </a:fontRef>
+          </p:style>
+        </p:cxnSp>
+        <p:cxnSp>
+          <p:nvCxnSpPr>
+            <p:cNvPr id="172" name="Straight Connector 171">
+              <a:extLst>
+                <a:ext uri="{FF2B5EF4-FFF2-40B4-BE49-F238E27FC236}">
+                  <a16:creationId xmlns:a16="http://schemas.microsoft.com/office/drawing/2014/main" id="{116B2241-DD43-5D12-DD96-EF4DFA06C811}"/>
+                </a:ext>
+              </a:extLst>
+            </p:cNvPr>
+            <p:cNvCxnSpPr>
+              <a:cxnSpLocks/>
+            </p:cNvCxnSpPr>
+            <p:nvPr/>
+          </p:nvCxnSpPr>
+          <p:spPr>
+            <a:xfrm flipV="1">
+              <a:off x="2057399" y="7589816"/>
+              <a:ext cx="0" cy="285750"/>
+            </a:xfrm>
+            <a:prstGeom prst="line">
+              <a:avLst/>
+            </a:prstGeom>
+            <a:ln w="76200">
+              <a:solidFill>
+                <a:schemeClr val="tx1"/>
+              </a:solidFill>
+            </a:ln>
+          </p:spPr>
+          <p:style>
+            <a:lnRef idx="2">
+              <a:schemeClr val="accent1"/>
+            </a:lnRef>
+            <a:fillRef idx="0">
+              <a:schemeClr val="accent1"/>
+            </a:fillRef>
+            <a:effectRef idx="1">
+              <a:schemeClr val="accent1"/>
+            </a:effectRef>
+            <a:fontRef idx="minor">
+              <a:schemeClr val="tx1"/>
+            </a:fontRef>
+          </p:style>
+        </p:cxnSp>
+      </p:grpSp>
+      <p:sp>
+        <p:nvSpPr>
+          <p:cNvPr id="173" name="TextBox 172">
+            <a:extLst>
+              <a:ext uri="{FF2B5EF4-FFF2-40B4-BE49-F238E27FC236}">
+                <a16:creationId xmlns:a16="http://schemas.microsoft.com/office/drawing/2014/main" id="{4ED6B8BB-7B63-1F1A-A9E3-8D7F841DCAA7}"/>
+              </a:ext>
+            </a:extLst>
+          </p:cNvPr>
+          <p:cNvSpPr txBox="1"/>
+          <p:nvPr/>
+        </p:nvSpPr>
+        <p:spPr>
+          <a:xfrm>
+            <a:off x="7915981" y="12285513"/>
+            <a:ext cx="1374184" cy="461665"/>
+          </a:xfrm>
+          <a:prstGeom prst="rect">
+            <a:avLst/>
+          </a:prstGeom>
+          <a:noFill/>
+        </p:spPr>
+        <p:txBody>
+          <a:bodyPr wrap="square" lIns="0" tIns="0" rIns="0" bIns="0" rtlCol="0">
+            <a:spAutoFit/>
+          </a:bodyPr>
+          <a:lstStyle/>
+          <a:p>
+            <a:pPr algn="ctr"/>
+            <a:r>
+              <a:rPr lang="en-US" sz="3000" dirty="0" err="1"/>
+              <a:t>X</a:t>
+            </a:r>
+            <a:r>
+              <a:rPr lang="en-US" sz="3000" baseline="-25000" dirty="0" err="1"/>
+              <a:t>p</a:t>
+            </a:r>
+            <a:endParaRPr lang="en-US" sz="3000" baseline="-25000" dirty="0"/>
+          </a:p>
+        </p:txBody>
+      </p:sp>
+      <p:sp>
+        <p:nvSpPr>
+          <p:cNvPr id="176" name="TextBox 175">
+            <a:extLst>
+              <a:ext uri="{FF2B5EF4-FFF2-40B4-BE49-F238E27FC236}">
+                <a16:creationId xmlns:a16="http://schemas.microsoft.com/office/drawing/2014/main" id="{304B514B-7C7C-1BE9-B912-EED10FDBBAE7}"/>
+              </a:ext>
+            </a:extLst>
+          </p:cNvPr>
+          <p:cNvSpPr txBox="1"/>
+          <p:nvPr/>
+        </p:nvSpPr>
+        <p:spPr>
+          <a:xfrm>
+            <a:off x="3732653" y="14688994"/>
+            <a:ext cx="1374184" cy="461665"/>
+          </a:xfrm>
+          <a:prstGeom prst="rect">
+            <a:avLst/>
+          </a:prstGeom>
+          <a:noFill/>
+        </p:spPr>
+        <p:txBody>
+          <a:bodyPr wrap="square" lIns="0" tIns="0" rIns="0" bIns="0" rtlCol="0">
+            <a:spAutoFit/>
+          </a:bodyPr>
+          <a:lstStyle/>
+          <a:p>
+            <a:pPr algn="ctr"/>
+            <a:r>
+              <a:rPr lang="en-US" sz="3000" dirty="0" err="1"/>
+              <a:t>Y</a:t>
+            </a:r>
+            <a:r>
+              <a:rPr lang="en-US" sz="3000" baseline="-25000" dirty="0" err="1"/>
+              <a:t>p</a:t>
+            </a:r>
+            <a:endParaRPr lang="en-US" sz="3000" baseline="-25000" dirty="0"/>
+          </a:p>
+        </p:txBody>
+      </p:sp>
+      <p:cxnSp>
+        <p:nvCxnSpPr>
+          <p:cNvPr id="177" name="Straight Connector 176">
+            <a:extLst>
+              <a:ext uri="{FF2B5EF4-FFF2-40B4-BE49-F238E27FC236}">
+                <a16:creationId xmlns:a16="http://schemas.microsoft.com/office/drawing/2014/main" id="{9DED5C20-9879-C79C-171B-B13D42B7ED0E}"/>
+              </a:ext>
+            </a:extLst>
+          </p:cNvPr>
+          <p:cNvCxnSpPr>
+            <a:cxnSpLocks/>
+          </p:cNvCxnSpPr>
+          <p:nvPr/>
+        </p:nvCxnSpPr>
+        <p:spPr>
+          <a:xfrm flipV="1">
+            <a:off x="10982629" y="11820439"/>
+            <a:ext cx="0" cy="3210840"/>
+          </a:xfrm>
+          <a:prstGeom prst="line">
+            <a:avLst/>
+          </a:prstGeom>
+          <a:ln w="38100">
+            <a:solidFill>
+              <a:schemeClr val="tx1"/>
+            </a:solidFill>
+            <a:prstDash val="dash"/>
+            <a:headEnd w="lg" len="lg"/>
+            <a:tailEnd type="triangle" w="lg" len="lg"/>
+          </a:ln>
+        </p:spPr>
+        <p:style>
+          <a:lnRef idx="2">
+            <a:schemeClr val="accent1"/>
+          </a:lnRef>
+          <a:fillRef idx="0">
+            <a:schemeClr val="accent1"/>
+          </a:fillRef>
+          <a:effectRef idx="1">
+            <a:schemeClr val="accent1"/>
+          </a:effectRef>
+          <a:fontRef idx="minor">
+            <a:schemeClr val="tx1"/>
+          </a:fontRef>
+        </p:style>
+      </p:cxnSp>
+      <p:cxnSp>
+        <p:nvCxnSpPr>
+          <p:cNvPr id="179" name="Straight Connector 178">
+            <a:extLst>
+              <a:ext uri="{FF2B5EF4-FFF2-40B4-BE49-F238E27FC236}">
+                <a16:creationId xmlns:a16="http://schemas.microsoft.com/office/drawing/2014/main" id="{DCECDC6A-8698-7D92-C2FC-0597607B0A85}"/>
+              </a:ext>
+            </a:extLst>
+          </p:cNvPr>
+          <p:cNvCxnSpPr>
+            <a:cxnSpLocks/>
+          </p:cNvCxnSpPr>
+          <p:nvPr/>
+        </p:nvCxnSpPr>
+        <p:spPr>
+          <a:xfrm flipH="1" flipV="1">
+            <a:off x="10982629" y="15031279"/>
+            <a:ext cx="3155883" cy="2807106"/>
+          </a:xfrm>
+          <a:prstGeom prst="line">
+            <a:avLst/>
+          </a:prstGeom>
+          <a:ln w="38100">
+            <a:solidFill>
+              <a:schemeClr val="tx1"/>
+            </a:solidFill>
+            <a:prstDash val="dash"/>
+            <a:headEnd type="triangle" w="lg" len="lg"/>
+            <a:tailEnd type="none" w="lg" len="lg"/>
+          </a:ln>
+        </p:spPr>
+        <p:style>
+          <a:lnRef idx="2">
+            <a:schemeClr val="accent1"/>
+          </a:lnRef>
+          <a:fillRef idx="0">
+            <a:schemeClr val="accent1"/>
+          </a:fillRef>
+          <a:effectRef idx="1">
+            <a:schemeClr val="accent1"/>
+          </a:effectRef>
+          <a:fontRef idx="minor">
+            <a:schemeClr val="tx1"/>
+          </a:fontRef>
+        </p:style>
+      </p:cxnSp>
+      <p:cxnSp>
+        <p:nvCxnSpPr>
+          <p:cNvPr id="181" name="Straight Connector 180">
+            <a:extLst>
+              <a:ext uri="{FF2B5EF4-FFF2-40B4-BE49-F238E27FC236}">
+                <a16:creationId xmlns:a16="http://schemas.microsoft.com/office/drawing/2014/main" id="{85D62F2C-E385-C06C-C780-1A5DC8FF8EAD}"/>
+              </a:ext>
+            </a:extLst>
+          </p:cNvPr>
+          <p:cNvCxnSpPr>
+            <a:cxnSpLocks/>
+          </p:cNvCxnSpPr>
+          <p:nvPr/>
+        </p:nvCxnSpPr>
+        <p:spPr>
+          <a:xfrm flipH="1">
+            <a:off x="11011205" y="13403506"/>
+            <a:ext cx="3938228" cy="1627773"/>
+          </a:xfrm>
+          <a:prstGeom prst="line">
+            <a:avLst/>
+          </a:prstGeom>
+          <a:ln w="38100">
+            <a:solidFill>
+              <a:schemeClr val="tx1"/>
+            </a:solidFill>
+            <a:prstDash val="dash"/>
+            <a:headEnd type="triangle" w="lg" len="lg"/>
+            <a:tailEnd type="none" w="lg" len="lg"/>
+          </a:ln>
+        </p:spPr>
+        <p:style>
+          <a:lnRef idx="2">
+            <a:schemeClr val="accent1"/>
+          </a:lnRef>
+          <a:fillRef idx="0">
+            <a:schemeClr val="accent1"/>
+          </a:fillRef>
+          <a:effectRef idx="1">
+            <a:schemeClr val="accent1"/>
+          </a:effectRef>
+          <a:fontRef idx="minor">
+            <a:schemeClr val="tx1"/>
+          </a:fontRef>
+        </p:style>
+      </p:cxnSp>
+      <p:sp>
+        <p:nvSpPr>
+          <p:cNvPr id="184" name="Oval 183">
+            <a:extLst>
+              <a:ext uri="{FF2B5EF4-FFF2-40B4-BE49-F238E27FC236}">
+                <a16:creationId xmlns:a16="http://schemas.microsoft.com/office/drawing/2014/main" id="{3328C822-9AF7-21D9-FDC7-182559F7F652}"/>
+              </a:ext>
+            </a:extLst>
+          </p:cNvPr>
+          <p:cNvSpPr/>
+          <p:nvPr/>
+        </p:nvSpPr>
+        <p:spPr>
+          <a:xfrm>
+            <a:off x="13820671" y="12449446"/>
+            <a:ext cx="342900" cy="342900"/>
+          </a:xfrm>
+          <a:prstGeom prst="ellipse">
+            <a:avLst/>
+          </a:prstGeom>
+          <a:solidFill>
+            <a:schemeClr val="accent5">
+              <a:lumMod val="40000"/>
+              <a:lumOff val="60000"/>
+            </a:schemeClr>
+          </a:solidFill>
+          <a:ln>
+            <a:noFill/>
+          </a:ln>
+        </p:spPr>
+        <p:style>
+          <a:lnRef idx="2">
+            <a:schemeClr val="accent1">
+              <a:shade val="15000"/>
+            </a:schemeClr>
+          </a:lnRef>
+          <a:fillRef idx="1">
+            <a:schemeClr val="accent1"/>
+          </a:fillRef>
+          <a:effectRef idx="0">
+            <a:schemeClr val="accent1"/>
+          </a:effectRef>
+          <a:fontRef idx="minor">
+            <a:schemeClr val="lt1"/>
+          </a:fontRef>
+        </p:style>
+        <p:txBody>
+          <a:bodyPr rtlCol="0" anchor="ctr"/>
+          <a:lstStyle/>
+          <a:p>
+            <a:pPr algn="ctr"/>
+            <a:endParaRPr lang="en-US" sz="3000" dirty="0"/>
+          </a:p>
+        </p:txBody>
+      </p:sp>
+      <p:cxnSp>
+        <p:nvCxnSpPr>
+          <p:cNvPr id="185" name="Straight Connector 184">
+            <a:extLst>
+              <a:ext uri="{FF2B5EF4-FFF2-40B4-BE49-F238E27FC236}">
+                <a16:creationId xmlns:a16="http://schemas.microsoft.com/office/drawing/2014/main" id="{174F4DF6-D930-BB78-9BFB-C951434BE21F}"/>
+              </a:ext>
+            </a:extLst>
+          </p:cNvPr>
+          <p:cNvCxnSpPr>
+            <a:cxnSpLocks/>
+          </p:cNvCxnSpPr>
+          <p:nvPr/>
+        </p:nvCxnSpPr>
+        <p:spPr>
+          <a:xfrm>
+            <a:off x="14006407" y="12607829"/>
+            <a:ext cx="3604806" cy="355967"/>
+          </a:xfrm>
+          <a:prstGeom prst="line">
+            <a:avLst/>
+          </a:prstGeom>
+          <a:ln w="76200">
+            <a:solidFill>
+              <a:schemeClr val="accent2">
+                <a:lumMod val="75000"/>
+              </a:schemeClr>
+            </a:solidFill>
+          </a:ln>
+        </p:spPr>
+        <p:style>
+          <a:lnRef idx="2">
+            <a:schemeClr val="accent1"/>
+          </a:lnRef>
+          <a:fillRef idx="0">
+            <a:schemeClr val="accent1"/>
+          </a:fillRef>
+          <a:effectRef idx="1">
+            <a:schemeClr val="accent1"/>
+          </a:effectRef>
+          <a:fontRef idx="minor">
+            <a:schemeClr val="tx1"/>
+          </a:fontRef>
+        </p:style>
+      </p:cxnSp>
+      <p:sp>
+        <p:nvSpPr>
+          <p:cNvPr id="186" name="Oval 185">
+            <a:extLst>
+              <a:ext uri="{FF2B5EF4-FFF2-40B4-BE49-F238E27FC236}">
+                <a16:creationId xmlns:a16="http://schemas.microsoft.com/office/drawing/2014/main" id="{FA906CCD-B46D-9B61-BE95-3B3E25AA7179}"/>
+              </a:ext>
+            </a:extLst>
+          </p:cNvPr>
+          <p:cNvSpPr/>
+          <p:nvPr/>
+        </p:nvSpPr>
+        <p:spPr>
+          <a:xfrm>
+            <a:off x="17403479" y="12850304"/>
+            <a:ext cx="342900" cy="342900"/>
+          </a:xfrm>
+          <a:prstGeom prst="ellipse">
+            <a:avLst/>
+          </a:prstGeom>
+          <a:solidFill>
+            <a:schemeClr val="accent6">
+              <a:lumMod val="60000"/>
+              <a:lumOff val="40000"/>
+            </a:schemeClr>
+          </a:solidFill>
+          <a:ln>
+            <a:noFill/>
+          </a:ln>
+        </p:spPr>
+        <p:style>
+          <a:lnRef idx="2">
+            <a:schemeClr val="accent1">
+              <a:shade val="15000"/>
+            </a:schemeClr>
+          </a:lnRef>
+          <a:fillRef idx="1">
+            <a:schemeClr val="accent1"/>
+          </a:fillRef>
+          <a:effectRef idx="0">
+            <a:schemeClr val="accent1"/>
+          </a:effectRef>
+          <a:fontRef idx="minor">
+            <a:schemeClr val="lt1"/>
+          </a:fontRef>
+        </p:style>
+        <p:txBody>
+          <a:bodyPr rtlCol="0" anchor="ctr"/>
+          <a:lstStyle/>
+          <a:p>
+            <a:pPr algn="ctr"/>
+            <a:endParaRPr lang="en-US" sz="3000"/>
+          </a:p>
+        </p:txBody>
+      </p:sp>
+      <p:sp>
+        <p:nvSpPr>
+          <p:cNvPr id="188" name="Arc 187">
+            <a:extLst>
+              <a:ext uri="{FF2B5EF4-FFF2-40B4-BE49-F238E27FC236}">
+                <a16:creationId xmlns:a16="http://schemas.microsoft.com/office/drawing/2014/main" id="{4625307A-F9CD-13D2-4DB5-38209ADD9C1E}"/>
+              </a:ext>
+            </a:extLst>
+          </p:cNvPr>
+          <p:cNvSpPr/>
+          <p:nvPr/>
+        </p:nvSpPr>
+        <p:spPr>
+          <a:xfrm>
+            <a:off x="2121760" y="4135677"/>
+            <a:ext cx="1371600" cy="1371600"/>
+          </a:xfrm>
+          <a:prstGeom prst="arc">
+            <a:avLst>
+              <a:gd name="adj1" fmla="val 17052951"/>
+              <a:gd name="adj2" fmla="val 0"/>
+            </a:avLst>
+          </a:prstGeom>
+          <a:ln w="38100">
+            <a:prstDash val="dash"/>
+          </a:ln>
+        </p:spPr>
+        <p:style>
+          <a:lnRef idx="2">
+            <a:schemeClr val="accent1"/>
+          </a:lnRef>
+          <a:fillRef idx="0">
+            <a:schemeClr val="accent1"/>
+          </a:fillRef>
+          <a:effectRef idx="1">
+            <a:schemeClr val="accent1"/>
+          </a:effectRef>
+          <a:fontRef idx="minor">
+            <a:schemeClr val="tx1"/>
+          </a:fontRef>
+        </p:style>
+        <p:txBody>
+          <a:bodyPr rtlCol="0" anchor="ctr"/>
+          <a:lstStyle/>
+          <a:p>
+            <a:pPr algn="ctr"/>
+            <a:endParaRPr lang="en-US" sz="3000"/>
+          </a:p>
+        </p:txBody>
+      </p:sp>
+      <p:cxnSp>
+        <p:nvCxnSpPr>
+          <p:cNvPr id="191" name="Straight Connector 190">
+            <a:extLst>
+              <a:ext uri="{FF2B5EF4-FFF2-40B4-BE49-F238E27FC236}">
+                <a16:creationId xmlns:a16="http://schemas.microsoft.com/office/drawing/2014/main" id="{091AC2F9-E305-0291-D39B-9303B44B4613}"/>
+              </a:ext>
+            </a:extLst>
+          </p:cNvPr>
+          <p:cNvCxnSpPr>
+            <a:cxnSpLocks/>
+          </p:cNvCxnSpPr>
+          <p:nvPr/>
+        </p:nvCxnSpPr>
+        <p:spPr>
+          <a:xfrm>
+            <a:off x="15834061" y="10361826"/>
+            <a:ext cx="1708153" cy="2561695"/>
+          </a:xfrm>
+          <a:prstGeom prst="line">
+            <a:avLst/>
+          </a:prstGeom>
+          <a:ln w="76200">
+            <a:solidFill>
+              <a:schemeClr val="accent2">
+                <a:lumMod val="75000"/>
+              </a:schemeClr>
+            </a:solidFill>
+          </a:ln>
+        </p:spPr>
+        <p:style>
+          <a:lnRef idx="2">
+            <a:schemeClr val="accent1"/>
+          </a:lnRef>
+          <a:fillRef idx="0">
+            <a:schemeClr val="accent1"/>
+          </a:fillRef>
+          <a:effectRef idx="1">
+            <a:schemeClr val="accent1"/>
+          </a:effectRef>
+          <a:fontRef idx="minor">
+            <a:schemeClr val="tx1"/>
+          </a:fontRef>
+        </p:style>
+      </p:cxnSp>
+      <p:sp>
+        <p:nvSpPr>
+          <p:cNvPr id="194" name="Oval 193">
+            <a:extLst>
+              <a:ext uri="{FF2B5EF4-FFF2-40B4-BE49-F238E27FC236}">
+                <a16:creationId xmlns:a16="http://schemas.microsoft.com/office/drawing/2014/main" id="{289F05A8-8E91-FC7F-4856-AF9D9EC24863}"/>
+              </a:ext>
+            </a:extLst>
+          </p:cNvPr>
+          <p:cNvSpPr/>
+          <p:nvPr/>
+        </p:nvSpPr>
+        <p:spPr>
+          <a:xfrm>
+            <a:off x="15653055" y="10162734"/>
+            <a:ext cx="342900" cy="342900"/>
+          </a:xfrm>
+          <a:prstGeom prst="ellipse">
+            <a:avLst/>
+          </a:prstGeom>
+          <a:solidFill>
+            <a:srgbClr val="FF0000"/>
+          </a:solidFill>
+          <a:ln>
+            <a:noFill/>
+          </a:ln>
+        </p:spPr>
+        <p:style>
+          <a:lnRef idx="2">
+            <a:schemeClr val="accent1">
+              <a:shade val="15000"/>
+            </a:schemeClr>
+          </a:lnRef>
+          <a:fillRef idx="1">
+            <a:schemeClr val="accent1"/>
+          </a:fillRef>
+          <a:effectRef idx="0">
+            <a:schemeClr val="accent1"/>
+          </a:effectRef>
+          <a:fontRef idx="minor">
+            <a:schemeClr val="lt1"/>
+          </a:fontRef>
+        </p:style>
+        <p:txBody>
+          <a:bodyPr rtlCol="0" anchor="ctr"/>
+          <a:lstStyle/>
+          <a:p>
+            <a:pPr algn="ctr"/>
+            <a:endParaRPr lang="en-US" sz="3000"/>
+          </a:p>
+        </p:txBody>
+      </p:sp>
+      <p:sp>
+        <p:nvSpPr>
+          <p:cNvPr id="195" name="TextBox 194">
+            <a:extLst>
+              <a:ext uri="{FF2B5EF4-FFF2-40B4-BE49-F238E27FC236}">
+                <a16:creationId xmlns:a16="http://schemas.microsoft.com/office/drawing/2014/main" id="{98E8B5BA-45DC-4E2B-ABDC-7C493CD6C452}"/>
+              </a:ext>
+            </a:extLst>
+          </p:cNvPr>
+          <p:cNvSpPr txBox="1"/>
+          <p:nvPr/>
+        </p:nvSpPr>
+        <p:spPr>
+          <a:xfrm>
+            <a:off x="15232413" y="12210615"/>
+            <a:ext cx="666750" cy="461665"/>
+          </a:xfrm>
+          <a:prstGeom prst="rect">
+            <a:avLst/>
+          </a:prstGeom>
+          <a:noFill/>
+        </p:spPr>
+        <p:txBody>
+          <a:bodyPr wrap="square" lIns="0" tIns="0" rIns="0" bIns="0" rtlCol="0">
+            <a:spAutoFit/>
+          </a:bodyPr>
+          <a:lstStyle/>
+          <a:p>
+            <a:pPr algn="ctr"/>
+            <a:r>
+              <a:rPr lang="en-US" sz="3000" dirty="0"/>
+              <a:t>C</a:t>
+            </a:r>
+          </a:p>
+        </p:txBody>
+      </p:sp>
+      <p:sp>
+        <p:nvSpPr>
+          <p:cNvPr id="196" name="TextBox 195">
+            <a:extLst>
+              <a:ext uri="{FF2B5EF4-FFF2-40B4-BE49-F238E27FC236}">
+                <a16:creationId xmlns:a16="http://schemas.microsoft.com/office/drawing/2014/main" id="{F62AEA7D-C5BC-CDAD-3C51-E0A5E697EB16}"/>
+              </a:ext>
+            </a:extLst>
+          </p:cNvPr>
+          <p:cNvSpPr txBox="1"/>
+          <p:nvPr/>
+        </p:nvSpPr>
+        <p:spPr>
+          <a:xfrm>
+            <a:off x="16875464" y="11358774"/>
+            <a:ext cx="666750" cy="461665"/>
+          </a:xfrm>
+          <a:prstGeom prst="rect">
+            <a:avLst/>
+          </a:prstGeom>
+          <a:noFill/>
+        </p:spPr>
+        <p:txBody>
+          <a:bodyPr wrap="square" lIns="0" tIns="0" rIns="0" bIns="0" rtlCol="0">
+            <a:spAutoFit/>
+          </a:bodyPr>
+          <a:lstStyle/>
+          <a:p>
+            <a:pPr algn="ctr"/>
+            <a:r>
+              <a:rPr lang="en-US" sz="3000" dirty="0"/>
+              <a:t>T</a:t>
+            </a:r>
+          </a:p>
+        </p:txBody>
+      </p:sp>
+      <p:sp>
+        <p:nvSpPr>
+          <p:cNvPr id="199" name="TextBox 198">
+            <a:extLst>
+              <a:ext uri="{FF2B5EF4-FFF2-40B4-BE49-F238E27FC236}">
+                <a16:creationId xmlns:a16="http://schemas.microsoft.com/office/drawing/2014/main" id="{EB3A0847-C205-FFC3-72C2-569A40533378}"/>
+              </a:ext>
+            </a:extLst>
+          </p:cNvPr>
+          <p:cNvSpPr txBox="1"/>
+          <p:nvPr/>
+        </p:nvSpPr>
+        <p:spPr>
+          <a:xfrm>
+            <a:off x="14450321" y="13122179"/>
+            <a:ext cx="1374184" cy="461665"/>
+          </a:xfrm>
+          <a:prstGeom prst="rect">
+            <a:avLst/>
+          </a:prstGeom>
+          <a:noFill/>
+        </p:spPr>
+        <p:txBody>
+          <a:bodyPr wrap="square" lIns="0" tIns="0" rIns="0" bIns="0" rtlCol="0">
+            <a:spAutoFit/>
+          </a:bodyPr>
+          <a:lstStyle/>
+          <a:p>
+            <a:pPr algn="ctr"/>
+            <a:r>
+              <a:rPr lang="en-US" sz="3000" dirty="0"/>
+              <a:t>Y</a:t>
+            </a:r>
+          </a:p>
+        </p:txBody>
+      </p:sp>
+      <p:sp>
+        <p:nvSpPr>
+          <p:cNvPr id="200" name="TextBox 199">
+            <a:extLst>
+              <a:ext uri="{FF2B5EF4-FFF2-40B4-BE49-F238E27FC236}">
+                <a16:creationId xmlns:a16="http://schemas.microsoft.com/office/drawing/2014/main" id="{EAFAE74D-A43C-37D1-80AA-D22D4F3A7A47}"/>
+              </a:ext>
+            </a:extLst>
+          </p:cNvPr>
+          <p:cNvSpPr txBox="1"/>
+          <p:nvPr/>
+        </p:nvSpPr>
+        <p:spPr>
+          <a:xfrm>
+            <a:off x="9876719" y="11451107"/>
+            <a:ext cx="1374184" cy="461665"/>
+          </a:xfrm>
+          <a:prstGeom prst="rect">
+            <a:avLst/>
+          </a:prstGeom>
+          <a:noFill/>
+        </p:spPr>
+        <p:txBody>
+          <a:bodyPr wrap="square" lIns="0" tIns="0" rIns="0" bIns="0" rtlCol="0">
+            <a:spAutoFit/>
+          </a:bodyPr>
+          <a:lstStyle/>
+          <a:p>
+            <a:pPr algn="ctr"/>
+            <a:r>
+              <a:rPr lang="en-US" sz="3000" dirty="0"/>
+              <a:t>Z</a:t>
+            </a:r>
+          </a:p>
+        </p:txBody>
+      </p:sp>
+      <p:sp>
+        <p:nvSpPr>
+          <p:cNvPr id="201" name="TextBox 200">
+            <a:extLst>
+              <a:ext uri="{FF2B5EF4-FFF2-40B4-BE49-F238E27FC236}">
+                <a16:creationId xmlns:a16="http://schemas.microsoft.com/office/drawing/2014/main" id="{3ACE7F69-9294-20A5-E4C3-7B451DED56E7}"/>
+              </a:ext>
+            </a:extLst>
+          </p:cNvPr>
+          <p:cNvSpPr txBox="1"/>
+          <p:nvPr/>
+        </p:nvSpPr>
+        <p:spPr>
+          <a:xfrm>
+            <a:off x="13664358" y="17923886"/>
+            <a:ext cx="1374184" cy="461665"/>
+          </a:xfrm>
+          <a:prstGeom prst="rect">
+            <a:avLst/>
+          </a:prstGeom>
+          <a:noFill/>
+        </p:spPr>
+        <p:txBody>
+          <a:bodyPr wrap="square" lIns="0" tIns="0" rIns="0" bIns="0" rtlCol="0">
+            <a:spAutoFit/>
+          </a:bodyPr>
+          <a:lstStyle/>
+          <a:p>
+            <a:pPr algn="ctr"/>
+            <a:r>
+              <a:rPr lang="en-US" sz="3000" dirty="0"/>
+              <a:t>X</a:t>
+            </a:r>
+          </a:p>
+        </p:txBody>
+      </p:sp>
+      <p:sp>
+        <p:nvSpPr>
+          <p:cNvPr id="3" name="TextBox 2">
+            <a:extLst>
+              <a:ext uri="{FF2B5EF4-FFF2-40B4-BE49-F238E27FC236}">
+                <a16:creationId xmlns:a16="http://schemas.microsoft.com/office/drawing/2014/main" id="{9DB2D226-AF73-98D4-9335-3C52DCDAE142}"/>
+              </a:ext>
+            </a:extLst>
+          </p:cNvPr>
+          <p:cNvSpPr txBox="1"/>
+          <p:nvPr/>
+        </p:nvSpPr>
+        <p:spPr>
+          <a:xfrm>
+            <a:off x="16178316" y="1017204"/>
+            <a:ext cx="596901" cy="461665"/>
+          </a:xfrm>
+          <a:prstGeom prst="rect">
+            <a:avLst/>
+          </a:prstGeom>
+          <a:noFill/>
+        </p:spPr>
+        <p:txBody>
+          <a:bodyPr wrap="square" lIns="0" tIns="0" rIns="0" bIns="0" rtlCol="0">
+            <a:spAutoFit/>
+          </a:bodyPr>
+          <a:lstStyle/>
+          <a:p>
+            <a:pPr algn="ctr"/>
+            <a:r>
+              <a:rPr lang="en-US" sz="3000" dirty="0"/>
+              <a:t>T’</a:t>
+            </a:r>
+          </a:p>
+        </p:txBody>
+      </p:sp>
+      <p:cxnSp>
+        <p:nvCxnSpPr>
+          <p:cNvPr id="4" name="Straight Connector 3">
+            <a:extLst>
+              <a:ext uri="{FF2B5EF4-FFF2-40B4-BE49-F238E27FC236}">
+                <a16:creationId xmlns:a16="http://schemas.microsoft.com/office/drawing/2014/main" id="{A5ADE4B5-C541-71CD-7D36-85559E76FF0A}"/>
+              </a:ext>
+            </a:extLst>
+          </p:cNvPr>
+          <p:cNvCxnSpPr>
+            <a:cxnSpLocks/>
+          </p:cNvCxnSpPr>
+          <p:nvPr/>
+        </p:nvCxnSpPr>
+        <p:spPr>
+          <a:xfrm>
+            <a:off x="16006847" y="2020076"/>
+            <a:ext cx="0" cy="1396224"/>
+          </a:xfrm>
+          <a:prstGeom prst="line">
+            <a:avLst/>
+          </a:prstGeom>
+          <a:ln w="38100">
+            <a:prstDash val="dash"/>
+          </a:ln>
+        </p:spPr>
+        <p:style>
+          <a:lnRef idx="2">
+            <a:schemeClr val="accent1"/>
+          </a:lnRef>
+          <a:fillRef idx="0">
+            <a:schemeClr val="accent1"/>
+          </a:fillRef>
+          <a:effectRef idx="1">
+            <a:schemeClr val="accent1"/>
+          </a:effectRef>
+          <a:fontRef idx="minor">
+            <a:schemeClr val="tx1"/>
+          </a:fontRef>
+        </p:style>
+      </p:cxnSp>
+      <p:cxnSp>
+        <p:nvCxnSpPr>
+          <p:cNvPr id="23" name="Straight Connector 22">
+            <a:extLst>
+              <a:ext uri="{FF2B5EF4-FFF2-40B4-BE49-F238E27FC236}">
+                <a16:creationId xmlns:a16="http://schemas.microsoft.com/office/drawing/2014/main" id="{82C3362F-DC51-C6AB-35B1-994ECFD8AFC8}"/>
+              </a:ext>
+            </a:extLst>
+          </p:cNvPr>
+          <p:cNvCxnSpPr>
+            <a:cxnSpLocks/>
+          </p:cNvCxnSpPr>
+          <p:nvPr/>
+        </p:nvCxnSpPr>
+        <p:spPr>
+          <a:xfrm>
+            <a:off x="16013378" y="546100"/>
+            <a:ext cx="0" cy="1429526"/>
+          </a:xfrm>
+          <a:prstGeom prst="line">
+            <a:avLst/>
+          </a:prstGeom>
+          <a:ln w="38100">
+            <a:prstDash val="dash"/>
+          </a:ln>
+        </p:spPr>
+        <p:style>
+          <a:lnRef idx="2">
+            <a:schemeClr val="accent1"/>
+          </a:lnRef>
+          <a:fillRef idx="0">
+            <a:schemeClr val="accent1"/>
+          </a:fillRef>
+          <a:effectRef idx="1">
+            <a:schemeClr val="accent1"/>
+          </a:effectRef>
+          <a:fontRef idx="minor">
+            <a:schemeClr val="tx1"/>
+          </a:fontRef>
+        </p:style>
+      </p:cxnSp>
+      <p:cxnSp>
+        <p:nvCxnSpPr>
+          <p:cNvPr id="47" name="Straight Connector 46">
+            <a:extLst>
+              <a:ext uri="{FF2B5EF4-FFF2-40B4-BE49-F238E27FC236}">
+                <a16:creationId xmlns:a16="http://schemas.microsoft.com/office/drawing/2014/main" id="{F8CBC41F-D809-4B83-EA92-DEB8573C2C39}"/>
+              </a:ext>
+            </a:extLst>
+          </p:cNvPr>
+          <p:cNvCxnSpPr>
+            <a:cxnSpLocks/>
+          </p:cNvCxnSpPr>
+          <p:nvPr/>
+        </p:nvCxnSpPr>
+        <p:spPr>
+          <a:xfrm flipH="1">
+            <a:off x="9432758" y="0"/>
+            <a:ext cx="0" cy="18288000"/>
+          </a:xfrm>
+          <a:prstGeom prst="line">
+            <a:avLst/>
+          </a:prstGeom>
+          <a:ln w="111125" cap="rnd">
+            <a:solidFill>
+              <a:schemeClr val="bg2">
+                <a:lumMod val="50000"/>
+                <a:alpha val="38000"/>
+              </a:schemeClr>
+            </a:solidFill>
+            <a:prstDash val="dash"/>
+            <a:round/>
+          </a:ln>
+        </p:spPr>
+        <p:style>
+          <a:lnRef idx="2">
+            <a:schemeClr val="accent1"/>
+          </a:lnRef>
+          <a:fillRef idx="0">
+            <a:schemeClr val="accent1"/>
+          </a:fillRef>
+          <a:effectRef idx="1">
+            <a:schemeClr val="accent1"/>
+          </a:effectRef>
+          <a:fontRef idx="minor">
+            <a:schemeClr val="tx1"/>
+          </a:fontRef>
+        </p:style>
+      </p:cxnSp>
+      <p:cxnSp>
+        <p:nvCxnSpPr>
+          <p:cNvPr id="48" name="Straight Connector 47">
+            <a:extLst>
+              <a:ext uri="{FF2B5EF4-FFF2-40B4-BE49-F238E27FC236}">
+                <a16:creationId xmlns:a16="http://schemas.microsoft.com/office/drawing/2014/main" id="{361FE116-1E7D-C775-6C1C-81AB0BFC71ED}"/>
+              </a:ext>
+            </a:extLst>
+          </p:cNvPr>
+          <p:cNvCxnSpPr>
+            <a:cxnSpLocks/>
+          </p:cNvCxnSpPr>
+          <p:nvPr/>
+        </p:nvCxnSpPr>
+        <p:spPr>
+          <a:xfrm>
+            <a:off x="288758" y="9168063"/>
+            <a:ext cx="17999242" cy="0"/>
+          </a:xfrm>
+          <a:prstGeom prst="line">
+            <a:avLst/>
+          </a:prstGeom>
+          <a:ln w="111125" cap="rnd">
+            <a:solidFill>
+              <a:schemeClr val="bg2">
+                <a:lumMod val="50000"/>
+                <a:alpha val="38000"/>
+              </a:schemeClr>
+            </a:solidFill>
+            <a:prstDash val="dash"/>
+            <a:round/>
+          </a:ln>
+        </p:spPr>
+        <p:style>
+          <a:lnRef idx="2">
+            <a:schemeClr val="accent1"/>
+          </a:lnRef>
+          <a:fillRef idx="0">
+            <a:schemeClr val="accent1"/>
+          </a:fillRef>
+          <a:effectRef idx="1">
+            <a:schemeClr val="accent1"/>
+          </a:effectRef>
+          <a:fontRef idx="minor">
+            <a:schemeClr val="tx1"/>
+          </a:fontRef>
+        </p:style>
+      </p:cxnSp>
+      <p:sp>
+        <p:nvSpPr>
+          <p:cNvPr id="50" name="TextBox 49">
+            <a:extLst>
+              <a:ext uri="{FF2B5EF4-FFF2-40B4-BE49-F238E27FC236}">
+                <a16:creationId xmlns:a16="http://schemas.microsoft.com/office/drawing/2014/main" id="{14362848-0DA1-1576-FCB5-5F53928A3996}"/>
+              </a:ext>
+            </a:extLst>
+          </p:cNvPr>
+          <p:cNvSpPr txBox="1"/>
+          <p:nvPr/>
+        </p:nvSpPr>
+        <p:spPr>
+          <a:xfrm>
+            <a:off x="9610104" y="227689"/>
+            <a:ext cx="3702438" cy="779026"/>
+          </a:xfrm>
+          <a:prstGeom prst="roundRect">
+            <a:avLst>
+              <a:gd name="adj" fmla="val 50000"/>
+            </a:avLst>
+          </a:prstGeom>
+          <a:solidFill>
+            <a:schemeClr val="tx1">
+              <a:alpha val="10000"/>
+            </a:schemeClr>
+          </a:solidFill>
+        </p:spPr>
+        <p:txBody>
+          <a:bodyPr wrap="square" lIns="0" tIns="0" rIns="0" bIns="0" rtlCol="0">
+            <a:spAutoFit/>
+          </a:bodyPr>
+          <a:lstStyle/>
+          <a:p>
+            <a:pPr algn="ctr"/>
+            <a:r>
+              <a:rPr lang="en-US" sz="3600" b="1" dirty="0"/>
+              <a:t>X– Z Plane</a:t>
+            </a:r>
+          </a:p>
+        </p:txBody>
+      </p:sp>
+      <p:sp>
+        <p:nvSpPr>
+          <p:cNvPr id="54" name="TextBox 53">
+            <a:extLst>
+              <a:ext uri="{FF2B5EF4-FFF2-40B4-BE49-F238E27FC236}">
+                <a16:creationId xmlns:a16="http://schemas.microsoft.com/office/drawing/2014/main" id="{FBAD4BA2-98F6-EB19-DE22-986E4F2FD573}"/>
+              </a:ext>
+            </a:extLst>
+          </p:cNvPr>
+          <p:cNvSpPr txBox="1"/>
+          <p:nvPr/>
+        </p:nvSpPr>
+        <p:spPr>
+          <a:xfrm>
+            <a:off x="299394" y="9718270"/>
+            <a:ext cx="3702438" cy="779026"/>
+          </a:xfrm>
+          <a:prstGeom prst="roundRect">
+            <a:avLst>
+              <a:gd name="adj" fmla="val 50000"/>
+            </a:avLst>
+          </a:prstGeom>
+          <a:solidFill>
+            <a:schemeClr val="tx1">
+              <a:alpha val="10000"/>
+            </a:schemeClr>
+          </a:solidFill>
+        </p:spPr>
+        <p:txBody>
+          <a:bodyPr wrap="square" lIns="0" tIns="0" rIns="0" bIns="0" rtlCol="0">
+            <a:spAutoFit/>
+          </a:bodyPr>
+          <a:lstStyle/>
+          <a:p>
+            <a:pPr algn="ctr"/>
+            <a:r>
+              <a:rPr lang="en-US" sz="3600" b="1" dirty="0"/>
+              <a:t>X – Y Plane</a:t>
+            </a:r>
+          </a:p>
+        </p:txBody>
+      </p:sp>
+      <p:cxnSp>
+        <p:nvCxnSpPr>
+          <p:cNvPr id="85" name="Straight Connector 84">
+            <a:extLst>
+              <a:ext uri="{FF2B5EF4-FFF2-40B4-BE49-F238E27FC236}">
+                <a16:creationId xmlns:a16="http://schemas.microsoft.com/office/drawing/2014/main" id="{312ED13E-F091-4FA2-1957-18B39FDE9989}"/>
+              </a:ext>
+            </a:extLst>
+          </p:cNvPr>
+          <p:cNvCxnSpPr>
+            <a:cxnSpLocks/>
+          </p:cNvCxnSpPr>
+          <p:nvPr/>
+        </p:nvCxnSpPr>
+        <p:spPr>
+          <a:xfrm flipV="1">
+            <a:off x="12367209" y="12632441"/>
+            <a:ext cx="1676400" cy="1435100"/>
+          </a:xfrm>
+          <a:prstGeom prst="line">
+            <a:avLst/>
+          </a:prstGeom>
+          <a:ln w="76200">
+            <a:solidFill>
+              <a:schemeClr val="accent2">
+                <a:lumMod val="75000"/>
+              </a:schemeClr>
+            </a:solidFill>
+          </a:ln>
+        </p:spPr>
+        <p:style>
+          <a:lnRef idx="2">
+            <a:schemeClr val="accent1"/>
+          </a:lnRef>
+          <a:fillRef idx="0">
+            <a:schemeClr val="accent1"/>
+          </a:fillRef>
+          <a:effectRef idx="1">
+            <a:schemeClr val="accent1"/>
+          </a:effectRef>
+          <a:fontRef idx="minor">
+            <a:schemeClr val="tx1"/>
+          </a:fontRef>
+        </p:style>
+      </p:cxnSp>
+      <p:cxnSp>
+        <p:nvCxnSpPr>
+          <p:cNvPr id="92" name="Straight Connector 91">
+            <a:extLst>
+              <a:ext uri="{FF2B5EF4-FFF2-40B4-BE49-F238E27FC236}">
+                <a16:creationId xmlns:a16="http://schemas.microsoft.com/office/drawing/2014/main" id="{D5A869A4-0C6C-E6D8-7159-8DDE84C0C2A4}"/>
+              </a:ext>
+            </a:extLst>
+          </p:cNvPr>
+          <p:cNvCxnSpPr>
+            <a:cxnSpLocks/>
+          </p:cNvCxnSpPr>
+          <p:nvPr/>
+        </p:nvCxnSpPr>
+        <p:spPr>
+          <a:xfrm flipV="1">
+            <a:off x="12438295" y="14005032"/>
+            <a:ext cx="0" cy="2387600"/>
+          </a:xfrm>
+          <a:prstGeom prst="line">
+            <a:avLst/>
+          </a:prstGeom>
+          <a:ln w="76200">
+            <a:solidFill>
+              <a:schemeClr val="accent2">
+                <a:lumMod val="75000"/>
+              </a:schemeClr>
+            </a:solidFill>
+          </a:ln>
+        </p:spPr>
+        <p:style>
+          <a:lnRef idx="2">
+            <a:schemeClr val="accent1"/>
+          </a:lnRef>
+          <a:fillRef idx="0">
+            <a:schemeClr val="accent1"/>
+          </a:fillRef>
+          <a:effectRef idx="1">
+            <a:schemeClr val="accent1"/>
+          </a:effectRef>
+          <a:fontRef idx="minor">
+            <a:schemeClr val="tx1"/>
+          </a:fontRef>
+        </p:style>
+      </p:cxnSp>
+      <p:sp>
+        <p:nvSpPr>
+          <p:cNvPr id="95" name="Oval 94">
+            <a:extLst>
+              <a:ext uri="{FF2B5EF4-FFF2-40B4-BE49-F238E27FC236}">
+                <a16:creationId xmlns:a16="http://schemas.microsoft.com/office/drawing/2014/main" id="{344B9EAE-76E4-96F5-0816-C6AD4F43B90B}"/>
+              </a:ext>
+            </a:extLst>
+          </p:cNvPr>
+          <p:cNvSpPr/>
+          <p:nvPr/>
+        </p:nvSpPr>
+        <p:spPr>
+          <a:xfrm>
+            <a:off x="12266844" y="13833582"/>
+            <a:ext cx="342900" cy="342900"/>
+          </a:xfrm>
+          <a:prstGeom prst="ellipse">
+            <a:avLst/>
+          </a:prstGeom>
+          <a:solidFill>
+            <a:schemeClr val="tx1"/>
+          </a:solidFill>
+          <a:ln>
+            <a:noFill/>
+          </a:ln>
+        </p:spPr>
+        <p:style>
+          <a:lnRef idx="2">
+            <a:schemeClr val="accent1">
+              <a:shade val="15000"/>
+            </a:schemeClr>
+          </a:lnRef>
+          <a:fillRef idx="1">
+            <a:schemeClr val="accent1"/>
+          </a:fillRef>
+          <a:effectRef idx="0">
+            <a:schemeClr val="accent1"/>
+          </a:effectRef>
+          <a:fontRef idx="minor">
+            <a:schemeClr val="lt1"/>
+          </a:fontRef>
+        </p:style>
+        <p:txBody>
+          <a:bodyPr rtlCol="0" anchor="ctr"/>
+          <a:lstStyle/>
+          <a:p>
+            <a:pPr algn="ctr"/>
+            <a:endParaRPr lang="en-US" sz="3000"/>
+          </a:p>
+        </p:txBody>
+      </p:sp>
+      <p:sp>
+        <p:nvSpPr>
+          <p:cNvPr id="2" name="TextBox 1">
+            <a:extLst>
+              <a:ext uri="{FF2B5EF4-FFF2-40B4-BE49-F238E27FC236}">
+                <a16:creationId xmlns:a16="http://schemas.microsoft.com/office/drawing/2014/main" id="{5781065D-F2F7-BEFB-EA70-B42302B4BDA8}"/>
+              </a:ext>
+            </a:extLst>
+          </p:cNvPr>
+          <p:cNvSpPr txBox="1"/>
+          <p:nvPr/>
+        </p:nvSpPr>
+        <p:spPr>
+          <a:xfrm>
+            <a:off x="12088540" y="14793122"/>
+            <a:ext cx="266699" cy="461665"/>
+          </a:xfrm>
+          <a:prstGeom prst="rect">
+            <a:avLst/>
+          </a:prstGeom>
+          <a:noFill/>
+        </p:spPr>
+        <p:txBody>
+          <a:bodyPr wrap="square" lIns="0" tIns="0" rIns="0" bIns="0" rtlCol="0">
+            <a:spAutoFit/>
+          </a:bodyPr>
+          <a:lstStyle/>
+          <a:p>
+            <a:pPr algn="ctr"/>
+            <a:r>
+              <a:rPr lang="en-US" sz="3000" dirty="0"/>
+              <a:t>A</a:t>
+            </a:r>
+          </a:p>
+        </p:txBody>
+      </p:sp>
+      <p:sp>
+        <p:nvSpPr>
+          <p:cNvPr id="7" name="TextBox 6">
+            <a:extLst>
+              <a:ext uri="{FF2B5EF4-FFF2-40B4-BE49-F238E27FC236}">
+                <a16:creationId xmlns:a16="http://schemas.microsoft.com/office/drawing/2014/main" id="{4F417B09-2D42-B876-1A43-D4D4675E43E5}"/>
+              </a:ext>
+            </a:extLst>
+          </p:cNvPr>
+          <p:cNvSpPr txBox="1"/>
+          <p:nvPr/>
+        </p:nvSpPr>
+        <p:spPr>
+          <a:xfrm>
+            <a:off x="12930171" y="12861621"/>
+            <a:ext cx="266699" cy="461665"/>
+          </a:xfrm>
+          <a:prstGeom prst="rect">
+            <a:avLst/>
+          </a:prstGeom>
+          <a:noFill/>
+        </p:spPr>
+        <p:txBody>
+          <a:bodyPr wrap="square" lIns="0" tIns="0" rIns="0" bIns="0" rtlCol="0">
+            <a:spAutoFit/>
+          </a:bodyPr>
+          <a:lstStyle/>
+          <a:p>
+            <a:pPr algn="ctr"/>
+            <a:r>
+              <a:rPr lang="en-US" sz="3000" dirty="0"/>
+              <a:t>B</a:t>
+            </a:r>
+          </a:p>
+        </p:txBody>
+      </p:sp>
+      <p:cxnSp>
+        <p:nvCxnSpPr>
+          <p:cNvPr id="24" name="Straight Connector 23">
+            <a:extLst>
+              <a:ext uri="{FF2B5EF4-FFF2-40B4-BE49-F238E27FC236}">
+                <a16:creationId xmlns:a16="http://schemas.microsoft.com/office/drawing/2014/main" id="{569418C4-E3BA-0ACD-CF85-EC5463C3C3C3}"/>
+              </a:ext>
+            </a:extLst>
+          </p:cNvPr>
+          <p:cNvCxnSpPr>
+            <a:cxnSpLocks/>
+          </p:cNvCxnSpPr>
+          <p:nvPr/>
+        </p:nvCxnSpPr>
+        <p:spPr>
+          <a:xfrm flipH="1" flipV="1">
+            <a:off x="10982629" y="15055891"/>
+            <a:ext cx="1455665" cy="1294790"/>
+          </a:xfrm>
+          <a:prstGeom prst="line">
+            <a:avLst/>
+          </a:prstGeom>
+          <a:ln w="76200">
+            <a:solidFill>
+              <a:schemeClr val="accent4"/>
+            </a:solidFill>
+            <a:prstDash val="solid"/>
+            <a:headEnd type="none" w="lg" len="lg"/>
+            <a:tailEnd type="none" w="lg" len="lg"/>
+          </a:ln>
+        </p:spPr>
+        <p:style>
+          <a:lnRef idx="2">
+            <a:schemeClr val="accent1"/>
+          </a:lnRef>
+          <a:fillRef idx="0">
+            <a:schemeClr val="accent1"/>
+          </a:fillRef>
+          <a:effectRef idx="1">
+            <a:schemeClr val="accent1"/>
+          </a:effectRef>
+          <a:fontRef idx="minor">
+            <a:schemeClr val="tx1"/>
+          </a:fontRef>
+        </p:style>
+      </p:cxnSp>
+      <p:sp>
+        <p:nvSpPr>
+          <p:cNvPr id="27" name="Arc 26">
+            <a:extLst>
+              <a:ext uri="{FF2B5EF4-FFF2-40B4-BE49-F238E27FC236}">
+                <a16:creationId xmlns:a16="http://schemas.microsoft.com/office/drawing/2014/main" id="{AB93CC59-B9BA-C0CF-D14E-F00CF4C6E010}"/>
+              </a:ext>
+            </a:extLst>
+          </p:cNvPr>
+          <p:cNvSpPr/>
+          <p:nvPr/>
+        </p:nvSpPr>
+        <p:spPr>
+          <a:xfrm>
+            <a:off x="10171708" y="13986235"/>
+            <a:ext cx="2721471" cy="2721471"/>
+          </a:xfrm>
+          <a:prstGeom prst="arc">
+            <a:avLst>
+              <a:gd name="adj1" fmla="val 19440578"/>
+              <a:gd name="adj2" fmla="val 2700000"/>
+            </a:avLst>
+          </a:prstGeom>
+          <a:ln w="38100">
+            <a:prstDash val="dash"/>
+          </a:ln>
+        </p:spPr>
+        <p:style>
+          <a:lnRef idx="2">
+            <a:schemeClr val="accent1"/>
+          </a:lnRef>
+          <a:fillRef idx="0">
+            <a:schemeClr val="accent1"/>
+          </a:fillRef>
+          <a:effectRef idx="1">
+            <a:schemeClr val="accent1"/>
+          </a:effectRef>
+          <a:fontRef idx="minor">
+            <a:schemeClr val="tx1"/>
+          </a:fontRef>
+        </p:style>
+        <p:txBody>
+          <a:bodyPr rtlCol="0" anchor="ctr"/>
+          <a:lstStyle/>
+          <a:p>
+            <a:pPr algn="ctr"/>
+            <a:endParaRPr lang="en-US" sz="3000"/>
+          </a:p>
+        </p:txBody>
+      </p:sp>
+      <p:sp>
+        <p:nvSpPr>
+          <p:cNvPr id="28" name="TextBox 27">
+            <a:extLst>
+              <a:ext uri="{FF2B5EF4-FFF2-40B4-BE49-F238E27FC236}">
+                <a16:creationId xmlns:a16="http://schemas.microsoft.com/office/drawing/2014/main" id="{2B04FF1C-B730-DC39-2AB8-9CB1B1387AC5}"/>
+              </a:ext>
+            </a:extLst>
+          </p:cNvPr>
+          <p:cNvSpPr txBox="1"/>
+          <p:nvPr/>
+        </p:nvSpPr>
+        <p:spPr>
+          <a:xfrm>
+            <a:off x="13063520" y="15240891"/>
+            <a:ext cx="1063624" cy="461665"/>
+          </a:xfrm>
+          <a:prstGeom prst="rect">
+            <a:avLst/>
+          </a:prstGeom>
+          <a:noFill/>
+        </p:spPr>
+        <p:txBody>
+          <a:bodyPr wrap="square" lIns="0" tIns="0" rIns="0" bIns="0" rtlCol="0">
+            <a:spAutoFit/>
+          </a:bodyPr>
+          <a:lstStyle/>
+          <a:p>
+            <a:pPr algn="ctr"/>
+            <a:r>
+              <a:rPr lang="el-GR" sz="3000" dirty="0"/>
+              <a:t>θ</a:t>
+            </a:r>
+            <a:r>
+              <a:rPr lang="en-US" sz="3000" baseline="-25000" dirty="0"/>
+              <a:t>offset</a:t>
+            </a:r>
+          </a:p>
+        </p:txBody>
+      </p:sp>
+      <p:sp>
+        <p:nvSpPr>
+          <p:cNvPr id="31" name="TextBox 30">
+            <a:extLst>
+              <a:ext uri="{FF2B5EF4-FFF2-40B4-BE49-F238E27FC236}">
+                <a16:creationId xmlns:a16="http://schemas.microsoft.com/office/drawing/2014/main" id="{A4EA83B3-61F1-AB4A-B071-A70C285545BF}"/>
+              </a:ext>
+            </a:extLst>
+          </p:cNvPr>
+          <p:cNvSpPr txBox="1"/>
+          <p:nvPr/>
+        </p:nvSpPr>
+        <p:spPr>
+          <a:xfrm>
+            <a:off x="10646837" y="15985779"/>
+            <a:ext cx="1063624" cy="461665"/>
+          </a:xfrm>
+          <a:prstGeom prst="rect">
+            <a:avLst/>
+          </a:prstGeom>
+          <a:noFill/>
+        </p:spPr>
+        <p:txBody>
+          <a:bodyPr wrap="square" lIns="0" tIns="0" rIns="0" bIns="0" rtlCol="0">
+            <a:spAutoFit/>
+          </a:bodyPr>
+          <a:lstStyle/>
+          <a:p>
+            <a:pPr algn="ctr"/>
+            <a:r>
+              <a:rPr lang="en-US" sz="3000" dirty="0" err="1"/>
+              <a:t>R</a:t>
+            </a:r>
+            <a:r>
+              <a:rPr lang="en-US" sz="3000" baseline="-25000" dirty="0" err="1"/>
+              <a:t>offset</a:t>
+            </a:r>
+            <a:endParaRPr lang="en-US" sz="3000" baseline="-25000" dirty="0"/>
+          </a:p>
+        </p:txBody>
+      </p:sp>
+      <p:sp>
+        <p:nvSpPr>
+          <p:cNvPr id="33" name="Arc 32">
+            <a:extLst>
+              <a:ext uri="{FF2B5EF4-FFF2-40B4-BE49-F238E27FC236}">
+                <a16:creationId xmlns:a16="http://schemas.microsoft.com/office/drawing/2014/main" id="{7E9585AB-0692-FF8F-F4E1-294DA366FEEF}"/>
+              </a:ext>
+            </a:extLst>
+          </p:cNvPr>
+          <p:cNvSpPr/>
+          <p:nvPr/>
+        </p:nvSpPr>
+        <p:spPr>
+          <a:xfrm>
+            <a:off x="14203405" y="1539156"/>
+            <a:ext cx="1054322" cy="1054322"/>
+          </a:xfrm>
+          <a:prstGeom prst="arc">
+            <a:avLst>
+              <a:gd name="adj1" fmla="val 6175692"/>
+              <a:gd name="adj2" fmla="val 10767410"/>
+            </a:avLst>
+          </a:prstGeom>
+          <a:ln w="38100">
+            <a:prstDash val="dash"/>
+          </a:ln>
+        </p:spPr>
+        <p:style>
+          <a:lnRef idx="2">
+            <a:schemeClr val="accent1"/>
+          </a:lnRef>
+          <a:fillRef idx="0">
+            <a:schemeClr val="accent1"/>
+          </a:fillRef>
+          <a:effectRef idx="1">
+            <a:schemeClr val="accent1"/>
+          </a:effectRef>
+          <a:fontRef idx="minor">
+            <a:schemeClr val="tx1"/>
+          </a:fontRef>
+        </p:style>
+        <p:txBody>
+          <a:bodyPr rtlCol="0" anchor="ctr"/>
+          <a:lstStyle/>
+          <a:p>
+            <a:pPr algn="ctr"/>
+            <a:endParaRPr lang="en-US" sz="3000"/>
+          </a:p>
+        </p:txBody>
+      </p:sp>
+      <p:cxnSp>
+        <p:nvCxnSpPr>
+          <p:cNvPr id="34" name="Straight Connector 33">
+            <a:extLst>
+              <a:ext uri="{FF2B5EF4-FFF2-40B4-BE49-F238E27FC236}">
+                <a16:creationId xmlns:a16="http://schemas.microsoft.com/office/drawing/2014/main" id="{28F649FC-E57D-125F-B410-8421E38700DB}"/>
+              </a:ext>
+            </a:extLst>
+          </p:cNvPr>
+          <p:cNvCxnSpPr>
+            <a:cxnSpLocks/>
+          </p:cNvCxnSpPr>
+          <p:nvPr/>
+        </p:nvCxnSpPr>
+        <p:spPr>
+          <a:xfrm>
+            <a:off x="12350313" y="2020076"/>
+            <a:ext cx="3692420" cy="0"/>
+          </a:xfrm>
+          <a:prstGeom prst="line">
+            <a:avLst/>
+          </a:prstGeom>
+          <a:ln w="38100">
+            <a:prstDash val="dash"/>
+          </a:ln>
+        </p:spPr>
+        <p:style>
+          <a:lnRef idx="2">
+            <a:schemeClr val="accent1"/>
+          </a:lnRef>
+          <a:fillRef idx="0">
+            <a:schemeClr val="accent1"/>
+          </a:fillRef>
+          <a:effectRef idx="1">
+            <a:schemeClr val="accent1"/>
+          </a:effectRef>
+          <a:fontRef idx="minor">
+            <a:schemeClr val="tx1"/>
+          </a:fontRef>
+        </p:style>
+      </p:cxnSp>
+      <p:sp>
+        <p:nvSpPr>
+          <p:cNvPr id="49" name="TextBox 48">
+            <a:extLst>
+              <a:ext uri="{FF2B5EF4-FFF2-40B4-BE49-F238E27FC236}">
+                <a16:creationId xmlns:a16="http://schemas.microsoft.com/office/drawing/2014/main" id="{9A36B846-E527-18E2-9180-A96FCCCCEBF0}"/>
+              </a:ext>
+            </a:extLst>
+          </p:cNvPr>
+          <p:cNvSpPr txBox="1"/>
+          <p:nvPr/>
+        </p:nvSpPr>
+        <p:spPr>
+          <a:xfrm>
+            <a:off x="14043226" y="2034274"/>
+            <a:ext cx="1063624" cy="461665"/>
+          </a:xfrm>
+          <a:prstGeom prst="rect">
+            <a:avLst/>
+          </a:prstGeom>
+          <a:noFill/>
+        </p:spPr>
+        <p:txBody>
+          <a:bodyPr wrap="square" lIns="0" tIns="0" rIns="0" bIns="0" rtlCol="0">
+            <a:spAutoFit/>
+          </a:bodyPr>
+          <a:lstStyle/>
+          <a:p>
+            <a:pPr algn="ctr"/>
+            <a:r>
+              <a:rPr lang="el-GR" sz="3000" dirty="0"/>
+              <a:t>θ</a:t>
+            </a:r>
+            <a:r>
+              <a:rPr lang="en-US" sz="3000" baseline="-25000" dirty="0"/>
+              <a:t>d</a:t>
+            </a:r>
+          </a:p>
+        </p:txBody>
+      </p:sp>
+    </p:spTree>
+    <p:extLst>
+      <p:ext uri="{BB962C8B-B14F-4D97-AF65-F5344CB8AC3E}">
+        <p14:creationId xmlns:p14="http://schemas.microsoft.com/office/powerpoint/2010/main" val="2991713530"/>
       </p:ext>
     </p:extLst>
   </p:cSld>
